--- a/assets/figures-editable/c1-c2/c2-e12.pptx
+++ b/assets/figures-editable/c1-c2/c2-e12.pptx
@@ -7,7 +7,7 @@
   <p:sldIdLst>
     <p:sldId id="256" r:id="rId7"/>
   </p:sldIdLst>
-  <p:sldSz cx="11948160" cy="7924799" type="screen4x3"/>
+  <p:sldSz cx="12191695" cy="6858000" type="screen4x3"/>
   <p:notesSz cx="6858000" cy="9144000"/>
   <p:defaultTextStyle>
     <a:defPPr>
@@ -3098,14 +3098,14 @@
       <p:grpSpPr/>
       <p:sp>
         <p:nvSpPr>
-          <p:cNvPr id="2" name="text1" descr="sci-ppt:C2-E12-001"/>
+          <p:cNvPr id="2" name="C2-E12 text 0" descr="sci-ppt:o000"/>
           <p:cNvSpPr txBox="1"/>
           <p:nvPr/>
         </p:nvSpPr>
         <p:spPr>
           <a:xfrm>
-            <a:off x="316992" y="268224"/>
-            <a:ext cx="11277600" cy="359054"/>
+            <a:off x="274320" y="118872"/>
+            <a:ext cx="11612880" cy="340105"/>
           </a:xfrm>
           <a:prstGeom prst="rect">
             <a:avLst/>
@@ -3114,7 +3114,7 @@
           <a:effectLst/>
         </p:spPr>
         <p:txBody>
-          <a:bodyPr wrap="none" lIns="27432" rIns="27432" tIns="18288" bIns="18288" anchor="ctr">
+          <a:bodyPr wrap="none" lIns="18288" rIns="18288" tIns="18288" bIns="18288" anchor="t">
             <a:spAutoFit/>
           </a:bodyPr>
           <a:lstStyle/>
@@ -3125,34 +3125,31 @@
               </a:spcAft>
             </a:pPr>
             <a:r>
-              <a:rPr sz="1823" b="0" i="0">
+              <a:rPr sz="1900" b="1" i="0">
                 <a:solidFill>
                   <a:srgbClr val="8EDBD4"/>
                 </a:solidFill>
                 <a:latin typeface="Arial"/>
               </a:rPr>
-              <a:t>C2-E12 | Physical-variable diagram</a:t>
-            </a:r>
-          </a:p>
-        </p:txBody>
-      </p:sp>
-      <p:sp>
-        <p:nvSpPr>
-          <p:cNvPr id="3" name="rect2" descr="sci-ppt:C2-E12-002"/>
-          <p:cNvSpPr/>
+              <a:t>C2-E12 · Verified empirical PFP property correlation</a:t>
+            </a:r>
+          </a:p>
+        </p:txBody>
+      </p:sp>
+      <p:cxnSp>
+        <p:nvCxnSpPr>
+          <p:cNvPr id="3" name="C2-E12 line 1" descr="sci-ppt:o001"/>
+          <p:cNvCxnSpPr/>
           <p:nvPr/>
-        </p:nvSpPr>
-        <p:spPr>
-          <a:xfrm>
-            <a:off x="975360" y="1706880"/>
-            <a:ext cx="3657600" cy="1219200"/>
-          </a:xfrm>
-          <a:prstGeom prst="rect">
+        </p:nvCxnSpPr>
+        <p:spPr>
+          <a:xfrm>
+            <a:off x="914400" y="5029200"/>
+            <a:ext cx="6583679" cy="0"/>
+          </a:xfrm>
+          <a:prstGeom prst="line">
             <a:avLst/>
           </a:prstGeom>
-          <a:solidFill>
-            <a:srgbClr val="213E4B"/>
-          </a:solidFill>
           <a:ln w="19050">
             <a:solidFill>
               <a:srgbClr val="B4C7D2"/>
@@ -3160,24 +3157,83 @@
           </a:ln>
           <a:effectLst/>
         </p:spPr>
-        <p:txBody>
-          <a:bodyPr rtlCol="0" anchor="ctr"/>
-          <a:lstStyle/>
-          <a:p>
-            <a:pPr algn="ctr"/>
-          </a:p>
-        </p:txBody>
-      </p:sp>
-      <p:sp>
-        <p:nvSpPr>
-          <p:cNvPr id="4" name="text3" descr="sci-ppt:C2-E12-003"/>
+      </p:cxnSp>
+      <p:cxnSp>
+        <p:nvCxnSpPr>
+          <p:cNvPr id="4" name="C2-E12 line 2" descr="sci-ppt:o002"/>
+          <p:cNvCxnSpPr/>
+          <p:nvPr/>
+        </p:nvCxnSpPr>
+        <p:spPr>
+          <a:xfrm>
+            <a:off x="914400" y="1371600"/>
+            <a:ext cx="0" cy="3657600"/>
+          </a:xfrm>
+          <a:prstGeom prst="line">
+            <a:avLst/>
+          </a:prstGeom>
+          <a:ln w="19050">
+            <a:solidFill>
+              <a:srgbClr val="B4C7D2"/>
+            </a:solidFill>
+          </a:ln>
+          <a:effectLst/>
+        </p:spPr>
+      </p:cxnSp>
+      <p:cxnSp>
+        <p:nvCxnSpPr>
+          <p:cNvPr id="5" name="C2-E12 line 3" descr="sci-ppt:o003"/>
+          <p:cNvCxnSpPr/>
+          <p:nvPr/>
+        </p:nvCxnSpPr>
+        <p:spPr>
+          <a:xfrm>
+            <a:off x="914400" y="5029200"/>
+            <a:ext cx="0" cy="64008"/>
+          </a:xfrm>
+          <a:prstGeom prst="line">
+            <a:avLst/>
+          </a:prstGeom>
+          <a:ln w="12700">
+            <a:solidFill>
+              <a:srgbClr val="B4C7D2"/>
+            </a:solidFill>
+          </a:ln>
+          <a:effectLst/>
+        </p:spPr>
+      </p:cxnSp>
+      <p:cxnSp>
+        <p:nvCxnSpPr>
+          <p:cNvPr id="6" name="C2-E12 line 4" descr="sci-ppt:o004"/>
+          <p:cNvCxnSpPr/>
+          <p:nvPr/>
+        </p:nvCxnSpPr>
+        <p:spPr>
+          <a:xfrm>
+            <a:off x="914400" y="1371600"/>
+            <a:ext cx="0" cy="3657600"/>
+          </a:xfrm>
+          <a:prstGeom prst="line">
+            <a:avLst/>
+          </a:prstGeom>
+          <a:ln w="7620">
+            <a:solidFill>
+              <a:srgbClr val="2E4756"/>
+            </a:solidFill>
+          </a:ln>
+          <a:effectLst/>
+        </p:spPr>
+      </p:cxnSp>
+      <p:sp>
+        <p:nvSpPr>
+          <p:cNvPr id="7" name="C2-E12 text 5" descr="sci-ppt:o005"/>
           <p:cNvSpPr txBox="1"/>
           <p:nvPr/>
         </p:nvSpPr>
         <p:spPr>
           <a:xfrm>
-            <a:off x="1097280" y="1828800"/>
-            <a:ext cx="3474720" cy="340156"/>
+            <a:off x="457200" y="5111496"/>
+            <a:ext cx="914400" cy="208407"/>
           </a:xfrm>
           <a:prstGeom prst="rect">
             <a:avLst/>
@@ -3186,7 +3242,843 @@
           <a:effectLst/>
         </p:spPr>
         <p:txBody>
-          <a:bodyPr wrap="none" lIns="27432" rIns="27432" tIns="18288" bIns="18288" anchor="ctr">
+          <a:bodyPr wrap="none" lIns="18288" rIns="18288" tIns="18288" bIns="18288" anchor="t">
+            <a:spAutoFit/>
+          </a:bodyPr>
+          <a:lstStyle/>
+          <a:p>
+            <a:pPr algn="ctr">
+              <a:spcAft>
+                <a:spcPts val="0"/>
+              </a:spcAft>
+            </a:pPr>
+            <a:r>
+              <a:rPr sz="1050" b="0" i="0">
+                <a:solidFill>
+                  <a:srgbClr val="B4C7D2"/>
+                </a:solidFill>
+                <a:latin typeface="Arial"/>
+              </a:rPr>
+              <a:t>280</a:t>
+            </a:r>
+          </a:p>
+        </p:txBody>
+      </p:sp>
+      <p:cxnSp>
+        <p:nvCxnSpPr>
+          <p:cNvPr id="8" name="C2-E12 line 6" descr="sci-ppt:o006"/>
+          <p:cNvCxnSpPr/>
+          <p:nvPr/>
+        </p:nvCxnSpPr>
+        <p:spPr>
+          <a:xfrm>
+            <a:off x="2011680" y="5029200"/>
+            <a:ext cx="0" cy="64008"/>
+          </a:xfrm>
+          <a:prstGeom prst="line">
+            <a:avLst/>
+          </a:prstGeom>
+          <a:ln w="12700">
+            <a:solidFill>
+              <a:srgbClr val="B4C7D2"/>
+            </a:solidFill>
+          </a:ln>
+          <a:effectLst/>
+        </p:spPr>
+      </p:cxnSp>
+      <p:cxnSp>
+        <p:nvCxnSpPr>
+          <p:cNvPr id="9" name="C2-E12 line 7" descr="sci-ppt:o007"/>
+          <p:cNvCxnSpPr/>
+          <p:nvPr/>
+        </p:nvCxnSpPr>
+        <p:spPr>
+          <a:xfrm>
+            <a:off x="2011680" y="1371600"/>
+            <a:ext cx="0" cy="3657600"/>
+          </a:xfrm>
+          <a:prstGeom prst="line">
+            <a:avLst/>
+          </a:prstGeom>
+          <a:ln w="7620">
+            <a:solidFill>
+              <a:srgbClr val="2E4756"/>
+            </a:solidFill>
+          </a:ln>
+          <a:effectLst/>
+        </p:spPr>
+      </p:cxnSp>
+      <p:sp>
+        <p:nvSpPr>
+          <p:cNvPr id="10" name="C2-E12 text 8" descr="sci-ppt:o008"/>
+          <p:cNvSpPr txBox="1"/>
+          <p:nvPr/>
+        </p:nvSpPr>
+        <p:spPr>
+          <a:xfrm>
+            <a:off x="1554480" y="5111496"/>
+            <a:ext cx="914400" cy="208407"/>
+          </a:xfrm>
+          <a:prstGeom prst="rect">
+            <a:avLst/>
+          </a:prstGeom>
+          <a:noFill/>
+          <a:effectLst/>
+        </p:spPr>
+        <p:txBody>
+          <a:bodyPr wrap="none" lIns="18288" rIns="18288" tIns="18288" bIns="18288" anchor="t">
+            <a:spAutoFit/>
+          </a:bodyPr>
+          <a:lstStyle/>
+          <a:p>
+            <a:pPr algn="ctr">
+              <a:spcAft>
+                <a:spcPts val="0"/>
+              </a:spcAft>
+            </a:pPr>
+            <a:r>
+              <a:rPr sz="1050" b="0" i="0">
+                <a:solidFill>
+                  <a:srgbClr val="B4C7D2"/>
+                </a:solidFill>
+                <a:latin typeface="Arial"/>
+              </a:rPr>
+              <a:t>290</a:t>
+            </a:r>
+          </a:p>
+        </p:txBody>
+      </p:sp>
+      <p:cxnSp>
+        <p:nvCxnSpPr>
+          <p:cNvPr id="11" name="C2-E12 line 9" descr="sci-ppt:o009"/>
+          <p:cNvCxnSpPr/>
+          <p:nvPr/>
+        </p:nvCxnSpPr>
+        <p:spPr>
+          <a:xfrm>
+            <a:off x="3108960" y="5029200"/>
+            <a:ext cx="0" cy="64008"/>
+          </a:xfrm>
+          <a:prstGeom prst="line">
+            <a:avLst/>
+          </a:prstGeom>
+          <a:ln w="12700">
+            <a:solidFill>
+              <a:srgbClr val="B4C7D2"/>
+            </a:solidFill>
+          </a:ln>
+          <a:effectLst/>
+        </p:spPr>
+      </p:cxnSp>
+      <p:cxnSp>
+        <p:nvCxnSpPr>
+          <p:cNvPr id="12" name="C2-E12 line 10" descr="sci-ppt:o010"/>
+          <p:cNvCxnSpPr/>
+          <p:nvPr/>
+        </p:nvCxnSpPr>
+        <p:spPr>
+          <a:xfrm>
+            <a:off x="3108960" y="1371600"/>
+            <a:ext cx="0" cy="3657600"/>
+          </a:xfrm>
+          <a:prstGeom prst="line">
+            <a:avLst/>
+          </a:prstGeom>
+          <a:ln w="7620">
+            <a:solidFill>
+              <a:srgbClr val="2E4756"/>
+            </a:solidFill>
+          </a:ln>
+          <a:effectLst/>
+        </p:spPr>
+      </p:cxnSp>
+      <p:sp>
+        <p:nvSpPr>
+          <p:cNvPr id="13" name="C2-E12 text 11" descr="sci-ppt:o011"/>
+          <p:cNvSpPr txBox="1"/>
+          <p:nvPr/>
+        </p:nvSpPr>
+        <p:spPr>
+          <a:xfrm>
+            <a:off x="2651760" y="5111496"/>
+            <a:ext cx="914400" cy="208407"/>
+          </a:xfrm>
+          <a:prstGeom prst="rect">
+            <a:avLst/>
+          </a:prstGeom>
+          <a:noFill/>
+          <a:effectLst/>
+        </p:spPr>
+        <p:txBody>
+          <a:bodyPr wrap="none" lIns="18288" rIns="18288" tIns="18288" bIns="18288" anchor="t">
+            <a:spAutoFit/>
+          </a:bodyPr>
+          <a:lstStyle/>
+          <a:p>
+            <a:pPr algn="ctr">
+              <a:spcAft>
+                <a:spcPts val="0"/>
+              </a:spcAft>
+            </a:pPr>
+            <a:r>
+              <a:rPr sz="1050" b="0" i="0">
+                <a:solidFill>
+                  <a:srgbClr val="B4C7D2"/>
+                </a:solidFill>
+                <a:latin typeface="Arial"/>
+              </a:rPr>
+              <a:t>300</a:t>
+            </a:r>
+          </a:p>
+        </p:txBody>
+      </p:sp>
+      <p:cxnSp>
+        <p:nvCxnSpPr>
+          <p:cNvPr id="14" name="C2-E12 line 12" descr="sci-ppt:o012"/>
+          <p:cNvCxnSpPr/>
+          <p:nvPr/>
+        </p:nvCxnSpPr>
+        <p:spPr>
+          <a:xfrm>
+            <a:off x="4206240" y="5029200"/>
+            <a:ext cx="0" cy="64008"/>
+          </a:xfrm>
+          <a:prstGeom prst="line">
+            <a:avLst/>
+          </a:prstGeom>
+          <a:ln w="12700">
+            <a:solidFill>
+              <a:srgbClr val="B4C7D2"/>
+            </a:solidFill>
+          </a:ln>
+          <a:effectLst/>
+        </p:spPr>
+      </p:cxnSp>
+      <p:cxnSp>
+        <p:nvCxnSpPr>
+          <p:cNvPr id="15" name="C2-E12 line 13" descr="sci-ppt:o013"/>
+          <p:cNvCxnSpPr/>
+          <p:nvPr/>
+        </p:nvCxnSpPr>
+        <p:spPr>
+          <a:xfrm>
+            <a:off x="4206240" y="1371600"/>
+            <a:ext cx="0" cy="3657600"/>
+          </a:xfrm>
+          <a:prstGeom prst="line">
+            <a:avLst/>
+          </a:prstGeom>
+          <a:ln w="7620">
+            <a:solidFill>
+              <a:srgbClr val="2E4756"/>
+            </a:solidFill>
+          </a:ln>
+          <a:effectLst/>
+        </p:spPr>
+      </p:cxnSp>
+      <p:sp>
+        <p:nvSpPr>
+          <p:cNvPr id="16" name="C2-E12 text 14" descr="sci-ppt:o014"/>
+          <p:cNvSpPr txBox="1"/>
+          <p:nvPr/>
+        </p:nvSpPr>
+        <p:spPr>
+          <a:xfrm>
+            <a:off x="3749039" y="5111496"/>
+            <a:ext cx="914400" cy="208407"/>
+          </a:xfrm>
+          <a:prstGeom prst="rect">
+            <a:avLst/>
+          </a:prstGeom>
+          <a:noFill/>
+          <a:effectLst/>
+        </p:spPr>
+        <p:txBody>
+          <a:bodyPr wrap="none" lIns="18288" rIns="18288" tIns="18288" bIns="18288" anchor="t">
+            <a:spAutoFit/>
+          </a:bodyPr>
+          <a:lstStyle/>
+          <a:p>
+            <a:pPr algn="ctr">
+              <a:spcAft>
+                <a:spcPts val="0"/>
+              </a:spcAft>
+            </a:pPr>
+            <a:r>
+              <a:rPr sz="1050" b="0" i="0">
+                <a:solidFill>
+                  <a:srgbClr val="B4C7D2"/>
+                </a:solidFill>
+                <a:latin typeface="Arial"/>
+              </a:rPr>
+              <a:t>310</a:t>
+            </a:r>
+          </a:p>
+        </p:txBody>
+      </p:sp>
+      <p:cxnSp>
+        <p:nvCxnSpPr>
+          <p:cNvPr id="17" name="C2-E12 line 15" descr="sci-ppt:o015"/>
+          <p:cNvCxnSpPr/>
+          <p:nvPr/>
+        </p:nvCxnSpPr>
+        <p:spPr>
+          <a:xfrm>
+            <a:off x="5303520" y="5029200"/>
+            <a:ext cx="0" cy="64008"/>
+          </a:xfrm>
+          <a:prstGeom prst="line">
+            <a:avLst/>
+          </a:prstGeom>
+          <a:ln w="12700">
+            <a:solidFill>
+              <a:srgbClr val="B4C7D2"/>
+            </a:solidFill>
+          </a:ln>
+          <a:effectLst/>
+        </p:spPr>
+      </p:cxnSp>
+      <p:cxnSp>
+        <p:nvCxnSpPr>
+          <p:cNvPr id="18" name="C2-E12 line 16" descr="sci-ppt:o016"/>
+          <p:cNvCxnSpPr/>
+          <p:nvPr/>
+        </p:nvCxnSpPr>
+        <p:spPr>
+          <a:xfrm>
+            <a:off x="5303520" y="1371600"/>
+            <a:ext cx="0" cy="3657600"/>
+          </a:xfrm>
+          <a:prstGeom prst="line">
+            <a:avLst/>
+          </a:prstGeom>
+          <a:ln w="7620">
+            <a:solidFill>
+              <a:srgbClr val="2E4756"/>
+            </a:solidFill>
+          </a:ln>
+          <a:effectLst/>
+        </p:spPr>
+      </p:cxnSp>
+      <p:sp>
+        <p:nvSpPr>
+          <p:cNvPr id="19" name="C2-E12 text 17" descr="sci-ppt:o017"/>
+          <p:cNvSpPr txBox="1"/>
+          <p:nvPr/>
+        </p:nvSpPr>
+        <p:spPr>
+          <a:xfrm>
+            <a:off x="4846320" y="5111496"/>
+            <a:ext cx="914400" cy="208407"/>
+          </a:xfrm>
+          <a:prstGeom prst="rect">
+            <a:avLst/>
+          </a:prstGeom>
+          <a:noFill/>
+          <a:effectLst/>
+        </p:spPr>
+        <p:txBody>
+          <a:bodyPr wrap="none" lIns="18288" rIns="18288" tIns="18288" bIns="18288" anchor="t">
+            <a:spAutoFit/>
+          </a:bodyPr>
+          <a:lstStyle/>
+          <a:p>
+            <a:pPr algn="ctr">
+              <a:spcAft>
+                <a:spcPts val="0"/>
+              </a:spcAft>
+            </a:pPr>
+            <a:r>
+              <a:rPr sz="1050" b="0" i="0">
+                <a:solidFill>
+                  <a:srgbClr val="B4C7D2"/>
+                </a:solidFill>
+                <a:latin typeface="Arial"/>
+              </a:rPr>
+              <a:t>320</a:t>
+            </a:r>
+          </a:p>
+        </p:txBody>
+      </p:sp>
+      <p:cxnSp>
+        <p:nvCxnSpPr>
+          <p:cNvPr id="20" name="C2-E12 line 18" descr="sci-ppt:o018"/>
+          <p:cNvCxnSpPr/>
+          <p:nvPr/>
+        </p:nvCxnSpPr>
+        <p:spPr>
+          <a:xfrm>
+            <a:off x="6400800" y="5029200"/>
+            <a:ext cx="0" cy="64008"/>
+          </a:xfrm>
+          <a:prstGeom prst="line">
+            <a:avLst/>
+          </a:prstGeom>
+          <a:ln w="12700">
+            <a:solidFill>
+              <a:srgbClr val="B4C7D2"/>
+            </a:solidFill>
+          </a:ln>
+          <a:effectLst/>
+        </p:spPr>
+      </p:cxnSp>
+      <p:cxnSp>
+        <p:nvCxnSpPr>
+          <p:cNvPr id="21" name="C2-E12 line 19" descr="sci-ppt:o019"/>
+          <p:cNvCxnSpPr/>
+          <p:nvPr/>
+        </p:nvCxnSpPr>
+        <p:spPr>
+          <a:xfrm>
+            <a:off x="6400800" y="1371600"/>
+            <a:ext cx="0" cy="3657600"/>
+          </a:xfrm>
+          <a:prstGeom prst="line">
+            <a:avLst/>
+          </a:prstGeom>
+          <a:ln w="7620">
+            <a:solidFill>
+              <a:srgbClr val="2E4756"/>
+            </a:solidFill>
+          </a:ln>
+          <a:effectLst/>
+        </p:spPr>
+      </p:cxnSp>
+      <p:sp>
+        <p:nvSpPr>
+          <p:cNvPr id="22" name="C2-E12 text 20" descr="sci-ppt:o020"/>
+          <p:cNvSpPr txBox="1"/>
+          <p:nvPr/>
+        </p:nvSpPr>
+        <p:spPr>
+          <a:xfrm>
+            <a:off x="5943600" y="5111496"/>
+            <a:ext cx="914400" cy="208407"/>
+          </a:xfrm>
+          <a:prstGeom prst="rect">
+            <a:avLst/>
+          </a:prstGeom>
+          <a:noFill/>
+          <a:effectLst/>
+        </p:spPr>
+        <p:txBody>
+          <a:bodyPr wrap="none" lIns="18288" rIns="18288" tIns="18288" bIns="18288" anchor="t">
+            <a:spAutoFit/>
+          </a:bodyPr>
+          <a:lstStyle/>
+          <a:p>
+            <a:pPr algn="ctr">
+              <a:spcAft>
+                <a:spcPts val="0"/>
+              </a:spcAft>
+            </a:pPr>
+            <a:r>
+              <a:rPr sz="1050" b="0" i="0">
+                <a:solidFill>
+                  <a:srgbClr val="B4C7D2"/>
+                </a:solidFill>
+                <a:latin typeface="Arial"/>
+              </a:rPr>
+              <a:t>330</a:t>
+            </a:r>
+          </a:p>
+        </p:txBody>
+      </p:sp>
+      <p:cxnSp>
+        <p:nvCxnSpPr>
+          <p:cNvPr id="23" name="C2-E12 line 21" descr="sci-ppt:o021"/>
+          <p:cNvCxnSpPr/>
+          <p:nvPr/>
+        </p:nvCxnSpPr>
+        <p:spPr>
+          <a:xfrm>
+            <a:off x="7498079" y="5029200"/>
+            <a:ext cx="0" cy="64008"/>
+          </a:xfrm>
+          <a:prstGeom prst="line">
+            <a:avLst/>
+          </a:prstGeom>
+          <a:ln w="12700">
+            <a:solidFill>
+              <a:srgbClr val="B4C7D2"/>
+            </a:solidFill>
+          </a:ln>
+          <a:effectLst/>
+        </p:spPr>
+      </p:cxnSp>
+      <p:cxnSp>
+        <p:nvCxnSpPr>
+          <p:cNvPr id="24" name="C2-E12 line 22" descr="sci-ppt:o022"/>
+          <p:cNvCxnSpPr/>
+          <p:nvPr/>
+        </p:nvCxnSpPr>
+        <p:spPr>
+          <a:xfrm>
+            <a:off x="7498079" y="1371600"/>
+            <a:ext cx="0" cy="3657600"/>
+          </a:xfrm>
+          <a:prstGeom prst="line">
+            <a:avLst/>
+          </a:prstGeom>
+          <a:ln w="7620">
+            <a:solidFill>
+              <a:srgbClr val="2E4756"/>
+            </a:solidFill>
+          </a:ln>
+          <a:effectLst/>
+        </p:spPr>
+      </p:cxnSp>
+      <p:sp>
+        <p:nvSpPr>
+          <p:cNvPr id="25" name="C2-E12 text 23" descr="sci-ppt:o023"/>
+          <p:cNvSpPr txBox="1"/>
+          <p:nvPr/>
+        </p:nvSpPr>
+        <p:spPr>
+          <a:xfrm>
+            <a:off x="7040879" y="5111496"/>
+            <a:ext cx="914400" cy="208407"/>
+          </a:xfrm>
+          <a:prstGeom prst="rect">
+            <a:avLst/>
+          </a:prstGeom>
+          <a:noFill/>
+          <a:effectLst/>
+        </p:spPr>
+        <p:txBody>
+          <a:bodyPr wrap="none" lIns="18288" rIns="18288" tIns="18288" bIns="18288" anchor="t">
+            <a:spAutoFit/>
+          </a:bodyPr>
+          <a:lstStyle/>
+          <a:p>
+            <a:pPr algn="ctr">
+              <a:spcAft>
+                <a:spcPts val="0"/>
+              </a:spcAft>
+            </a:pPr>
+            <a:r>
+              <a:rPr sz="1050" b="0" i="0">
+                <a:solidFill>
+                  <a:srgbClr val="B4C7D2"/>
+                </a:solidFill>
+                <a:latin typeface="Arial"/>
+              </a:rPr>
+              <a:t>340</a:t>
+            </a:r>
+          </a:p>
+        </p:txBody>
+      </p:sp>
+      <p:cxnSp>
+        <p:nvCxnSpPr>
+          <p:cNvPr id="26" name="C2-E12 line 24" descr="sci-ppt:o024"/>
+          <p:cNvCxnSpPr/>
+          <p:nvPr/>
+        </p:nvCxnSpPr>
+        <p:spPr>
+          <a:xfrm>
+            <a:off x="850392" y="4606055"/>
+            <a:ext cx="64008" cy="0"/>
+          </a:xfrm>
+          <a:prstGeom prst="line">
+            <a:avLst/>
+          </a:prstGeom>
+          <a:ln w="12700">
+            <a:solidFill>
+              <a:srgbClr val="B4C7D2"/>
+            </a:solidFill>
+          </a:ln>
+          <a:effectLst/>
+        </p:spPr>
+      </p:cxnSp>
+      <p:cxnSp>
+        <p:nvCxnSpPr>
+          <p:cNvPr id="27" name="C2-E12 line 25" descr="sci-ppt:o025"/>
+          <p:cNvCxnSpPr/>
+          <p:nvPr/>
+        </p:nvCxnSpPr>
+        <p:spPr>
+          <a:xfrm>
+            <a:off x="914400" y="4606055"/>
+            <a:ext cx="6583679" cy="0"/>
+          </a:xfrm>
+          <a:prstGeom prst="line">
+            <a:avLst/>
+          </a:prstGeom>
+          <a:ln w="7620">
+            <a:solidFill>
+              <a:srgbClr val="2E4756"/>
+            </a:solidFill>
+          </a:ln>
+          <a:effectLst/>
+        </p:spPr>
+      </p:cxnSp>
+      <p:sp>
+        <p:nvSpPr>
+          <p:cNvPr id="28" name="C2-E12 text 26" descr="sci-ppt:o026"/>
+          <p:cNvSpPr txBox="1"/>
+          <p:nvPr/>
+        </p:nvSpPr>
+        <p:spPr>
+          <a:xfrm>
+            <a:off x="45720" y="4523759"/>
+            <a:ext cx="777240" cy="208407"/>
+          </a:xfrm>
+          <a:prstGeom prst="rect">
+            <a:avLst/>
+          </a:prstGeom>
+          <a:noFill/>
+          <a:effectLst/>
+        </p:spPr>
+        <p:txBody>
+          <a:bodyPr wrap="none" lIns="18288" rIns="18288" tIns="18288" bIns="18288" anchor="t">
+            <a:spAutoFit/>
+          </a:bodyPr>
+          <a:lstStyle/>
+          <a:p>
+            <a:pPr algn="r">
+              <a:spcAft>
+                <a:spcPts val="0"/>
+              </a:spcAft>
+            </a:pPr>
+            <a:r>
+              <a:rPr sz="1050" b="0" i="0">
+                <a:solidFill>
+                  <a:srgbClr val="B4C7D2"/>
+                </a:solidFill>
+                <a:latin typeface="Arial"/>
+              </a:rPr>
+              <a:t>0.1</a:t>
+            </a:r>
+          </a:p>
+        </p:txBody>
+      </p:sp>
+      <p:cxnSp>
+        <p:nvCxnSpPr>
+          <p:cNvPr id="29" name="C2-E12 line 27" descr="sci-ppt:o027"/>
+          <p:cNvCxnSpPr/>
+          <p:nvPr/>
+        </p:nvCxnSpPr>
+        <p:spPr>
+          <a:xfrm>
+            <a:off x="850392" y="3200400"/>
+            <a:ext cx="64008" cy="0"/>
+          </a:xfrm>
+          <a:prstGeom prst="line">
+            <a:avLst/>
+          </a:prstGeom>
+          <a:ln w="12700">
+            <a:solidFill>
+              <a:srgbClr val="B4C7D2"/>
+            </a:solidFill>
+          </a:ln>
+          <a:effectLst/>
+        </p:spPr>
+      </p:cxnSp>
+      <p:cxnSp>
+        <p:nvCxnSpPr>
+          <p:cNvPr id="30" name="C2-E12 line 28" descr="sci-ppt:o028"/>
+          <p:cNvCxnSpPr/>
+          <p:nvPr/>
+        </p:nvCxnSpPr>
+        <p:spPr>
+          <a:xfrm>
+            <a:off x="914400" y="3200400"/>
+            <a:ext cx="6583679" cy="0"/>
+          </a:xfrm>
+          <a:prstGeom prst="line">
+            <a:avLst/>
+          </a:prstGeom>
+          <a:ln w="7620">
+            <a:solidFill>
+              <a:srgbClr val="2E4756"/>
+            </a:solidFill>
+          </a:ln>
+          <a:effectLst/>
+        </p:spPr>
+      </p:cxnSp>
+      <p:sp>
+        <p:nvSpPr>
+          <p:cNvPr id="31" name="C2-E12 text 29" descr="sci-ppt:o029"/>
+          <p:cNvSpPr txBox="1"/>
+          <p:nvPr/>
+        </p:nvSpPr>
+        <p:spPr>
+          <a:xfrm>
+            <a:off x="45720" y="3118104"/>
+            <a:ext cx="777240" cy="208407"/>
+          </a:xfrm>
+          <a:prstGeom prst="rect">
+            <a:avLst/>
+          </a:prstGeom>
+          <a:noFill/>
+          <a:effectLst/>
+        </p:spPr>
+        <p:txBody>
+          <a:bodyPr wrap="none" lIns="18288" rIns="18288" tIns="18288" bIns="18288" anchor="t">
+            <a:spAutoFit/>
+          </a:bodyPr>
+          <a:lstStyle/>
+          <a:p>
+            <a:pPr algn="r">
+              <a:spcAft>
+                <a:spcPts val="0"/>
+              </a:spcAft>
+            </a:pPr>
+            <a:r>
+              <a:rPr sz="1050" b="0" i="0">
+                <a:solidFill>
+                  <a:srgbClr val="B4C7D2"/>
+                </a:solidFill>
+                <a:latin typeface="Arial"/>
+              </a:rPr>
+              <a:t>1</a:t>
+            </a:r>
+          </a:p>
+        </p:txBody>
+      </p:sp>
+      <p:cxnSp>
+        <p:nvCxnSpPr>
+          <p:cNvPr id="32" name="C2-E12 line 30" descr="sci-ppt:o030"/>
+          <p:cNvCxnSpPr/>
+          <p:nvPr/>
+        </p:nvCxnSpPr>
+        <p:spPr>
+          <a:xfrm>
+            <a:off x="850392" y="1794744"/>
+            <a:ext cx="64008" cy="0"/>
+          </a:xfrm>
+          <a:prstGeom prst="line">
+            <a:avLst/>
+          </a:prstGeom>
+          <a:ln w="12700">
+            <a:solidFill>
+              <a:srgbClr val="B4C7D2"/>
+            </a:solidFill>
+          </a:ln>
+          <a:effectLst/>
+        </p:spPr>
+      </p:cxnSp>
+      <p:cxnSp>
+        <p:nvCxnSpPr>
+          <p:cNvPr id="33" name="C2-E12 line 31" descr="sci-ppt:o031"/>
+          <p:cNvCxnSpPr/>
+          <p:nvPr/>
+        </p:nvCxnSpPr>
+        <p:spPr>
+          <a:xfrm>
+            <a:off x="914400" y="1794744"/>
+            <a:ext cx="6583679" cy="0"/>
+          </a:xfrm>
+          <a:prstGeom prst="line">
+            <a:avLst/>
+          </a:prstGeom>
+          <a:ln w="7620">
+            <a:solidFill>
+              <a:srgbClr val="2E4756"/>
+            </a:solidFill>
+          </a:ln>
+          <a:effectLst/>
+        </p:spPr>
+      </p:cxnSp>
+      <p:sp>
+        <p:nvSpPr>
+          <p:cNvPr id="34" name="C2-E12 text 32" descr="sci-ppt:o032"/>
+          <p:cNvSpPr txBox="1"/>
+          <p:nvPr/>
+        </p:nvSpPr>
+        <p:spPr>
+          <a:xfrm>
+            <a:off x="45720" y="1712448"/>
+            <a:ext cx="777240" cy="208407"/>
+          </a:xfrm>
+          <a:prstGeom prst="rect">
+            <a:avLst/>
+          </a:prstGeom>
+          <a:noFill/>
+          <a:effectLst/>
+        </p:spPr>
+        <p:txBody>
+          <a:bodyPr wrap="none" lIns="18288" rIns="18288" tIns="18288" bIns="18288" anchor="t">
+            <a:spAutoFit/>
+          </a:bodyPr>
+          <a:lstStyle/>
+          <a:p>
+            <a:pPr algn="r">
+              <a:spcAft>
+                <a:spcPts val="0"/>
+              </a:spcAft>
+            </a:pPr>
+            <a:r>
+              <a:rPr sz="1050" b="0" i="0">
+                <a:solidFill>
+                  <a:srgbClr val="B4C7D2"/>
+                </a:solidFill>
+                <a:latin typeface="Arial"/>
+              </a:rPr>
+              <a:t>10</a:t>
+            </a:r>
+          </a:p>
+        </p:txBody>
+      </p:sp>
+      <p:sp>
+        <p:nvSpPr>
+          <p:cNvPr id="35" name="C2-E12 text 33" descr="sci-ppt:o033"/>
+          <p:cNvSpPr txBox="1"/>
+          <p:nvPr/>
+        </p:nvSpPr>
+        <p:spPr>
+          <a:xfrm>
+            <a:off x="914400" y="5312664"/>
+            <a:ext cx="6583680" cy="231648"/>
+          </a:xfrm>
+          <a:prstGeom prst="rect">
+            <a:avLst/>
+          </a:prstGeom>
+          <a:noFill/>
+          <a:effectLst/>
+        </p:spPr>
+        <p:txBody>
+          <a:bodyPr wrap="none" lIns="18288" rIns="18288" tIns="18288" bIns="18288" anchor="t">
+            <a:spAutoFit/>
+          </a:bodyPr>
+          <a:lstStyle/>
+          <a:p>
+            <a:pPr algn="ctr">
+              <a:spcAft>
+                <a:spcPts val="0"/>
+              </a:spcAft>
+            </a:pPr>
+            <a:r>
+              <a:rPr sz="1200" b="0" i="0">
+                <a:solidFill>
+                  <a:srgbClr val="E7F0F3"/>
+                </a:solidFill>
+                <a:latin typeface="Arial"/>
+              </a:rPr>
+              <a:t>temperature T  (K)</a:t>
+            </a:r>
+          </a:p>
+        </p:txBody>
+      </p:sp>
+      <p:sp>
+        <p:nvSpPr>
+          <p:cNvPr id="36" name="C2-E12 text 34" descr="sci-ppt:o034"/>
+          <p:cNvSpPr txBox="1"/>
+          <p:nvPr/>
+        </p:nvSpPr>
+        <p:spPr>
+          <a:xfrm>
+            <a:off x="365760" y="1024128"/>
+            <a:ext cx="6583680" cy="231648"/>
+          </a:xfrm>
+          <a:prstGeom prst="rect">
+            <a:avLst/>
+          </a:prstGeom>
+          <a:noFill/>
+          <a:effectLst/>
+        </p:spPr>
+        <p:txBody>
+          <a:bodyPr wrap="none" lIns="18288" rIns="18288" tIns="18288" bIns="18288" anchor="t">
             <a:spAutoFit/>
           </a:bodyPr>
           <a:lstStyle/>
@@ -3197,75 +4089,720 @@
               </a:spcAft>
             </a:pPr>
             <a:r>
-              <a:rPr sz="1728" b="0" i="0">
+              <a:rPr sz="1200" b="0" i="0">
                 <a:solidFill>
                   <a:srgbClr val="E7F0F3"/>
                 </a:solidFill>
                 <a:latin typeface="Arial"/>
               </a:rPr>
-              <a:t>Liquid | vapor equilibrium</a:t>
-            </a:r>
+              <a:t>pₛₐₜ,PFP  (bar)</a:t>
+            </a:r>
+          </a:p>
+        </p:txBody>
+      </p:sp>
+      <p:sp>
+        <p:nvSpPr>
+          <p:cNvPr id="37" name="C2-E12 polygon 35" descr="sci-ppt:o035"/>
+          <p:cNvSpPr/>
+          <p:nvPr/>
+        </p:nvSpPr>
+        <p:spPr>
+          <a:xfrm>
+            <a:off x="1223832" y="2489777"/>
+            <a:ext cx="6048208" cy="1179730"/>
+          </a:xfrm>
+          <a:custGeom>
+            <a:avLst/>
+            <a:gdLst/>
+            <a:ahLst/>
+            <a:cxnLst/>
+            <a:rect l="l" t="t" r="r" b="b"/>
+            <a:pathLst>
+              <a:path w="6048208" h="1179730">
+                <a:moveTo>
+                  <a:pt x="0" y="1179730"/>
+                </a:moveTo>
+                <a:lnTo>
+                  <a:pt x="30393" y="1172466"/>
+                </a:lnTo>
+                <a:lnTo>
+                  <a:pt x="60786" y="1165218"/>
+                </a:lnTo>
+                <a:lnTo>
+                  <a:pt x="91179" y="1157986"/>
+                </a:lnTo>
+                <a:lnTo>
+                  <a:pt x="121572" y="1150771"/>
+                </a:lnTo>
+                <a:lnTo>
+                  <a:pt x="151965" y="1143573"/>
+                </a:lnTo>
+                <a:lnTo>
+                  <a:pt x="182358" y="1136390"/>
+                </a:lnTo>
+                <a:lnTo>
+                  <a:pt x="212751" y="1129224"/>
+                </a:lnTo>
+                <a:lnTo>
+                  <a:pt x="243144" y="1122074"/>
+                </a:lnTo>
+                <a:lnTo>
+                  <a:pt x="273537" y="1114940"/>
+                </a:lnTo>
+                <a:lnTo>
+                  <a:pt x="303930" y="1107822"/>
+                </a:lnTo>
+                <a:lnTo>
+                  <a:pt x="334323" y="1100721"/>
+                </a:lnTo>
+                <a:lnTo>
+                  <a:pt x="364716" y="1093635"/>
+                </a:lnTo>
+                <a:lnTo>
+                  <a:pt x="395109" y="1086565"/>
+                </a:lnTo>
+                <a:lnTo>
+                  <a:pt x="425502" y="1079511"/>
+                </a:lnTo>
+                <a:lnTo>
+                  <a:pt x="455895" y="1072473"/>
+                </a:lnTo>
+                <a:lnTo>
+                  <a:pt x="486288" y="1065450"/>
+                </a:lnTo>
+                <a:lnTo>
+                  <a:pt x="516681" y="1058443"/>
+                </a:lnTo>
+                <a:lnTo>
+                  <a:pt x="547074" y="1051452"/>
+                </a:lnTo>
+                <a:lnTo>
+                  <a:pt x="577467" y="1044477"/>
+                </a:lnTo>
+                <a:lnTo>
+                  <a:pt x="607860" y="1037517"/>
+                </a:lnTo>
+                <a:lnTo>
+                  <a:pt x="638253" y="1030572"/>
+                </a:lnTo>
+                <a:lnTo>
+                  <a:pt x="668646" y="1023643"/>
+                </a:lnTo>
+                <a:lnTo>
+                  <a:pt x="699040" y="1016730"/>
+                </a:lnTo>
+                <a:lnTo>
+                  <a:pt x="729433" y="1009831"/>
+                </a:lnTo>
+                <a:lnTo>
+                  <a:pt x="759826" y="1002948"/>
+                </a:lnTo>
+                <a:lnTo>
+                  <a:pt x="790219" y="996081"/>
+                </a:lnTo>
+                <a:lnTo>
+                  <a:pt x="820612" y="989228"/>
+                </a:lnTo>
+                <a:lnTo>
+                  <a:pt x="851005" y="982391"/>
+                </a:lnTo>
+                <a:lnTo>
+                  <a:pt x="881398" y="975568"/>
+                </a:lnTo>
+                <a:lnTo>
+                  <a:pt x="911791" y="968761"/>
+                </a:lnTo>
+                <a:lnTo>
+                  <a:pt x="942184" y="961968"/>
+                </a:lnTo>
+                <a:lnTo>
+                  <a:pt x="972577" y="955191"/>
+                </a:lnTo>
+                <a:lnTo>
+                  <a:pt x="1002970" y="948429"/>
+                </a:lnTo>
+                <a:lnTo>
+                  <a:pt x="1033363" y="941681"/>
+                </a:lnTo>
+                <a:lnTo>
+                  <a:pt x="1063756" y="934948"/>
+                </a:lnTo>
+                <a:lnTo>
+                  <a:pt x="1094149" y="928230"/>
+                </a:lnTo>
+                <a:lnTo>
+                  <a:pt x="1124542" y="921526"/>
+                </a:lnTo>
+                <a:lnTo>
+                  <a:pt x="1154935" y="914837"/>
+                </a:lnTo>
+                <a:lnTo>
+                  <a:pt x="1185328" y="908163"/>
+                </a:lnTo>
+                <a:lnTo>
+                  <a:pt x="1215721" y="901504"/>
+                </a:lnTo>
+                <a:lnTo>
+                  <a:pt x="1246114" y="894858"/>
+                </a:lnTo>
+                <a:lnTo>
+                  <a:pt x="1276507" y="888228"/>
+                </a:lnTo>
+                <a:lnTo>
+                  <a:pt x="1306900" y="881611"/>
+                </a:lnTo>
+                <a:lnTo>
+                  <a:pt x="1337293" y="875009"/>
+                </a:lnTo>
+                <a:lnTo>
+                  <a:pt x="1367686" y="868422"/>
+                </a:lnTo>
+                <a:lnTo>
+                  <a:pt x="1398079" y="861848"/>
+                </a:lnTo>
+                <a:lnTo>
+                  <a:pt x="1428472" y="855289"/>
+                </a:lnTo>
+                <a:lnTo>
+                  <a:pt x="1458865" y="848744"/>
+                </a:lnTo>
+                <a:lnTo>
+                  <a:pt x="1489258" y="842213"/>
+                </a:lnTo>
+                <a:lnTo>
+                  <a:pt x="1519651" y="835697"/>
+                </a:lnTo>
+                <a:lnTo>
+                  <a:pt x="1550044" y="829194"/>
+                </a:lnTo>
+                <a:lnTo>
+                  <a:pt x="1580437" y="822705"/>
+                </a:lnTo>
+                <a:lnTo>
+                  <a:pt x="1610830" y="816230"/>
+                </a:lnTo>
+                <a:lnTo>
+                  <a:pt x="1641223" y="809770"/>
+                </a:lnTo>
+                <a:lnTo>
+                  <a:pt x="1671616" y="803322"/>
+                </a:lnTo>
+                <a:lnTo>
+                  <a:pt x="1702009" y="796889"/>
+                </a:lnTo>
+                <a:lnTo>
+                  <a:pt x="1732402" y="790470"/>
+                </a:lnTo>
+                <a:lnTo>
+                  <a:pt x="1762795" y="784064"/>
+                </a:lnTo>
+                <a:lnTo>
+                  <a:pt x="1793188" y="777672"/>
+                </a:lnTo>
+                <a:lnTo>
+                  <a:pt x="1823581" y="771294"/>
+                </a:lnTo>
+                <a:lnTo>
+                  <a:pt x="1853974" y="764929"/>
+                </a:lnTo>
+                <a:lnTo>
+                  <a:pt x="1884367" y="758578"/>
+                </a:lnTo>
+                <a:lnTo>
+                  <a:pt x="1914760" y="752240"/>
+                </a:lnTo>
+                <a:lnTo>
+                  <a:pt x="1945153" y="745916"/>
+                </a:lnTo>
+                <a:lnTo>
+                  <a:pt x="1975546" y="739605"/>
+                </a:lnTo>
+                <a:lnTo>
+                  <a:pt x="2005939" y="733307"/>
+                </a:lnTo>
+                <a:lnTo>
+                  <a:pt x="2036332" y="727023"/>
+                </a:lnTo>
+                <a:lnTo>
+                  <a:pt x="2066725" y="720752"/>
+                </a:lnTo>
+                <a:lnTo>
+                  <a:pt x="2097118" y="714495"/>
+                </a:lnTo>
+                <a:lnTo>
+                  <a:pt x="2127511" y="708250"/>
+                </a:lnTo>
+                <a:lnTo>
+                  <a:pt x="2157904" y="702019"/>
+                </a:lnTo>
+                <a:lnTo>
+                  <a:pt x="2188297" y="695801"/>
+                </a:lnTo>
+                <a:lnTo>
+                  <a:pt x="2218690" y="689596"/>
+                </a:lnTo>
+                <a:lnTo>
+                  <a:pt x="2249083" y="683404"/>
+                </a:lnTo>
+                <a:lnTo>
+                  <a:pt x="2279476" y="677225"/>
+                </a:lnTo>
+                <a:lnTo>
+                  <a:pt x="2309869" y="671059"/>
+                </a:lnTo>
+                <a:lnTo>
+                  <a:pt x="2340262" y="664906"/>
+                </a:lnTo>
+                <a:lnTo>
+                  <a:pt x="2370655" y="658765"/>
+                </a:lnTo>
+                <a:lnTo>
+                  <a:pt x="2401048" y="652638"/>
+                </a:lnTo>
+                <a:lnTo>
+                  <a:pt x="2431441" y="646523"/>
+                </a:lnTo>
+                <a:lnTo>
+                  <a:pt x="2461834" y="640422"/>
+                </a:lnTo>
+                <a:lnTo>
+                  <a:pt x="2492227" y="634332"/>
+                </a:lnTo>
+                <a:lnTo>
+                  <a:pt x="2522620" y="628256"/>
+                </a:lnTo>
+                <a:lnTo>
+                  <a:pt x="2553013" y="622192"/>
+                </a:lnTo>
+                <a:lnTo>
+                  <a:pt x="2583406" y="616141"/>
+                </a:lnTo>
+                <a:lnTo>
+                  <a:pt x="2613799" y="610102"/>
+                </a:lnTo>
+                <a:lnTo>
+                  <a:pt x="2644192" y="604076"/>
+                </a:lnTo>
+                <a:lnTo>
+                  <a:pt x="2674585" y="598063"/>
+                </a:lnTo>
+                <a:lnTo>
+                  <a:pt x="2704978" y="592061"/>
+                </a:lnTo>
+                <a:lnTo>
+                  <a:pt x="2735371" y="586073"/>
+                </a:lnTo>
+                <a:lnTo>
+                  <a:pt x="2765764" y="580096"/>
+                </a:lnTo>
+                <a:lnTo>
+                  <a:pt x="2796157" y="574132"/>
+                </a:lnTo>
+                <a:lnTo>
+                  <a:pt x="2826550" y="568180"/>
+                </a:lnTo>
+                <a:lnTo>
+                  <a:pt x="2856943" y="562241"/>
+                </a:lnTo>
+                <a:lnTo>
+                  <a:pt x="2887336" y="556314"/>
+                </a:lnTo>
+                <a:lnTo>
+                  <a:pt x="2917729" y="550398"/>
+                </a:lnTo>
+                <a:lnTo>
+                  <a:pt x="2948122" y="544495"/>
+                </a:lnTo>
+                <a:lnTo>
+                  <a:pt x="2978515" y="538605"/>
+                </a:lnTo>
+                <a:lnTo>
+                  <a:pt x="3008908" y="532726"/>
+                </a:lnTo>
+                <a:lnTo>
+                  <a:pt x="3039301" y="526859"/>
+                </a:lnTo>
+                <a:lnTo>
+                  <a:pt x="3069694" y="521004"/>
+                </a:lnTo>
+                <a:lnTo>
+                  <a:pt x="3100087" y="515161"/>
+                </a:lnTo>
+                <a:lnTo>
+                  <a:pt x="3130480" y="509330"/>
+                </a:lnTo>
+                <a:lnTo>
+                  <a:pt x="3160873" y="503511"/>
+                </a:lnTo>
+                <a:lnTo>
+                  <a:pt x="3191266" y="497704"/>
+                </a:lnTo>
+                <a:lnTo>
+                  <a:pt x="3221659" y="491909"/>
+                </a:lnTo>
+                <a:lnTo>
+                  <a:pt x="3252052" y="486125"/>
+                </a:lnTo>
+                <a:lnTo>
+                  <a:pt x="3282445" y="480353"/>
+                </a:lnTo>
+                <a:lnTo>
+                  <a:pt x="3312838" y="474593"/>
+                </a:lnTo>
+                <a:lnTo>
+                  <a:pt x="3343231" y="468844"/>
+                </a:lnTo>
+                <a:lnTo>
+                  <a:pt x="3373624" y="463107"/>
+                </a:lnTo>
+                <a:lnTo>
+                  <a:pt x="3404017" y="457382"/>
+                </a:lnTo>
+                <a:lnTo>
+                  <a:pt x="3434410" y="451668"/>
+                </a:lnTo>
+                <a:lnTo>
+                  <a:pt x="3464803" y="445966"/>
+                </a:lnTo>
+                <a:lnTo>
+                  <a:pt x="3495196" y="440276"/>
+                </a:lnTo>
+                <a:lnTo>
+                  <a:pt x="3525589" y="434596"/>
+                </a:lnTo>
+                <a:lnTo>
+                  <a:pt x="3555982" y="428928"/>
+                </a:lnTo>
+                <a:lnTo>
+                  <a:pt x="3586375" y="423272"/>
+                </a:lnTo>
+                <a:lnTo>
+                  <a:pt x="3616768" y="417627"/>
+                </a:lnTo>
+                <a:lnTo>
+                  <a:pt x="3647161" y="411993"/>
+                </a:lnTo>
+                <a:lnTo>
+                  <a:pt x="3677554" y="406371"/>
+                </a:lnTo>
+                <a:lnTo>
+                  <a:pt x="3707947" y="400759"/>
+                </a:lnTo>
+                <a:lnTo>
+                  <a:pt x="3738340" y="395159"/>
+                </a:lnTo>
+                <a:lnTo>
+                  <a:pt x="3768733" y="389570"/>
+                </a:lnTo>
+                <a:lnTo>
+                  <a:pt x="3799126" y="383993"/>
+                </a:lnTo>
+                <a:lnTo>
+                  <a:pt x="3829519" y="378426"/>
+                </a:lnTo>
+                <a:lnTo>
+                  <a:pt x="3859912" y="372871"/>
+                </a:lnTo>
+                <a:lnTo>
+                  <a:pt x="3890305" y="367326"/>
+                </a:lnTo>
+                <a:lnTo>
+                  <a:pt x="3920698" y="361793"/>
+                </a:lnTo>
+                <a:lnTo>
+                  <a:pt x="3951091" y="356270"/>
+                </a:lnTo>
+                <a:lnTo>
+                  <a:pt x="3981484" y="350759"/>
+                </a:lnTo>
+                <a:lnTo>
+                  <a:pt x="4011877" y="345258"/>
+                </a:lnTo>
+                <a:lnTo>
+                  <a:pt x="4042270" y="339769"/>
+                </a:lnTo>
+                <a:lnTo>
+                  <a:pt x="4072663" y="334290"/>
+                </a:lnTo>
+                <a:lnTo>
+                  <a:pt x="4103056" y="328822"/>
+                </a:lnTo>
+                <a:lnTo>
+                  <a:pt x="4133449" y="323365"/>
+                </a:lnTo>
+                <a:lnTo>
+                  <a:pt x="4163842" y="317918"/>
+                </a:lnTo>
+                <a:lnTo>
+                  <a:pt x="4194235" y="312482"/>
+                </a:lnTo>
+                <a:lnTo>
+                  <a:pt x="4224628" y="307057"/>
+                </a:lnTo>
+                <a:lnTo>
+                  <a:pt x="4255021" y="301643"/>
+                </a:lnTo>
+                <a:lnTo>
+                  <a:pt x="4285414" y="296239"/>
+                </a:lnTo>
+                <a:lnTo>
+                  <a:pt x="4315807" y="290846"/>
+                </a:lnTo>
+                <a:lnTo>
+                  <a:pt x="4346200" y="285463"/>
+                </a:lnTo>
+                <a:lnTo>
+                  <a:pt x="4376593" y="280091"/>
+                </a:lnTo>
+                <a:lnTo>
+                  <a:pt x="4406986" y="274730"/>
+                </a:lnTo>
+                <a:lnTo>
+                  <a:pt x="4437379" y="269379"/>
+                </a:lnTo>
+                <a:lnTo>
+                  <a:pt x="4467772" y="264038"/>
+                </a:lnTo>
+                <a:lnTo>
+                  <a:pt x="4498165" y="258708"/>
+                </a:lnTo>
+                <a:lnTo>
+                  <a:pt x="4528558" y="253388"/>
+                </a:lnTo>
+                <a:lnTo>
+                  <a:pt x="4558951" y="248079"/>
+                </a:lnTo>
+                <a:lnTo>
+                  <a:pt x="4589344" y="242780"/>
+                </a:lnTo>
+                <a:lnTo>
+                  <a:pt x="4619737" y="237491"/>
+                </a:lnTo>
+                <a:lnTo>
+                  <a:pt x="4650130" y="232212"/>
+                </a:lnTo>
+                <a:lnTo>
+                  <a:pt x="4680523" y="226944"/>
+                </a:lnTo>
+                <a:lnTo>
+                  <a:pt x="4710916" y="221686"/>
+                </a:lnTo>
+                <a:lnTo>
+                  <a:pt x="4741309" y="216438"/>
+                </a:lnTo>
+                <a:lnTo>
+                  <a:pt x="4771702" y="211200"/>
+                </a:lnTo>
+                <a:lnTo>
+                  <a:pt x="4802095" y="205972"/>
+                </a:lnTo>
+                <a:lnTo>
+                  <a:pt x="4832488" y="200755"/>
+                </a:lnTo>
+                <a:lnTo>
+                  <a:pt x="4862881" y="195547"/>
+                </a:lnTo>
+                <a:lnTo>
+                  <a:pt x="4893274" y="190350"/>
+                </a:lnTo>
+                <a:lnTo>
+                  <a:pt x="4923667" y="185162"/>
+                </a:lnTo>
+                <a:lnTo>
+                  <a:pt x="4954060" y="179985"/>
+                </a:lnTo>
+                <a:lnTo>
+                  <a:pt x="4984453" y="174817"/>
+                </a:lnTo>
+                <a:lnTo>
+                  <a:pt x="5014846" y="169659"/>
+                </a:lnTo>
+                <a:lnTo>
+                  <a:pt x="5045239" y="164512"/>
+                </a:lnTo>
+                <a:lnTo>
+                  <a:pt x="5075632" y="159374"/>
+                </a:lnTo>
+                <a:lnTo>
+                  <a:pt x="5106025" y="154246"/>
+                </a:lnTo>
+                <a:lnTo>
+                  <a:pt x="5136418" y="149127"/>
+                </a:lnTo>
+                <a:lnTo>
+                  <a:pt x="5166811" y="144019"/>
+                </a:lnTo>
+                <a:lnTo>
+                  <a:pt x="5197204" y="138920"/>
+                </a:lnTo>
+                <a:lnTo>
+                  <a:pt x="5227597" y="133831"/>
+                </a:lnTo>
+                <a:lnTo>
+                  <a:pt x="5257990" y="128751"/>
+                </a:lnTo>
+                <a:lnTo>
+                  <a:pt x="5288383" y="123682"/>
+                </a:lnTo>
+                <a:lnTo>
+                  <a:pt x="5318776" y="118622"/>
+                </a:lnTo>
+                <a:lnTo>
+                  <a:pt x="5349169" y="113571"/>
+                </a:lnTo>
+                <a:lnTo>
+                  <a:pt x="5379562" y="108530"/>
+                </a:lnTo>
+                <a:lnTo>
+                  <a:pt x="5409955" y="103499"/>
+                </a:lnTo>
+                <a:lnTo>
+                  <a:pt x="5440348" y="98477"/>
+                </a:lnTo>
+                <a:lnTo>
+                  <a:pt x="5470741" y="93465"/>
+                </a:lnTo>
+                <a:lnTo>
+                  <a:pt x="5501134" y="88462"/>
+                </a:lnTo>
+                <a:lnTo>
+                  <a:pt x="5531527" y="83468"/>
+                </a:lnTo>
+                <a:lnTo>
+                  <a:pt x="5561920" y="78484"/>
+                </a:lnTo>
+                <a:lnTo>
+                  <a:pt x="5592313" y="73510"/>
+                </a:lnTo>
+                <a:lnTo>
+                  <a:pt x="5622706" y="68545"/>
+                </a:lnTo>
+                <a:lnTo>
+                  <a:pt x="5653099" y="63589"/>
+                </a:lnTo>
+                <a:lnTo>
+                  <a:pt x="5683492" y="58642"/>
+                </a:lnTo>
+                <a:lnTo>
+                  <a:pt x="5713885" y="53705"/>
+                </a:lnTo>
+                <a:lnTo>
+                  <a:pt x="5744278" y="48777"/>
+                </a:lnTo>
+                <a:lnTo>
+                  <a:pt x="5774671" y="43858"/>
+                </a:lnTo>
+                <a:lnTo>
+                  <a:pt x="5805064" y="38948"/>
+                </a:lnTo>
+                <a:lnTo>
+                  <a:pt x="5835457" y="34048"/>
+                </a:lnTo>
+                <a:lnTo>
+                  <a:pt x="5865850" y="29157"/>
+                </a:lnTo>
+                <a:lnTo>
+                  <a:pt x="5896243" y="24274"/>
+                </a:lnTo>
+                <a:lnTo>
+                  <a:pt x="5926636" y="19401"/>
+                </a:lnTo>
+                <a:lnTo>
+                  <a:pt x="5957029" y="14537"/>
+                </a:lnTo>
+                <a:lnTo>
+                  <a:pt x="5987422" y="9683"/>
+                </a:lnTo>
+                <a:lnTo>
+                  <a:pt x="6017815" y="4837"/>
+                </a:lnTo>
+                <a:lnTo>
+                  <a:pt x="6048208" y="0"/>
+                </a:lnTo>
+              </a:path>
+            </a:pathLst>
+          </a:custGeom>
+          <a:noFill/>
+          <a:ln w="38100">
+            <a:solidFill>
+              <a:srgbClr val="8EDBD4"/>
+            </a:solidFill>
+          </a:ln>
+          <a:effectLst/>
+        </p:spPr>
+        <p:txBody>
+          <a:bodyPr rtlCol="0" anchor="ctr"/>
+          <a:lstStyle/>
+          <a:p>
+            <a:pPr algn="ctr"/>
           </a:p>
         </p:txBody>
       </p:sp>
       <p:cxnSp>
         <p:nvCxnSpPr>
-          <p:cNvPr id="5" name="arrow4" descr="sci-ppt:C2-E12-004"/>
+          <p:cNvPr id="38" name="C2-E12 line 36" descr="sci-ppt:o036"/>
           <p:cNvCxnSpPr/>
           <p:nvPr/>
         </p:nvCxnSpPr>
         <p:spPr>
           <a:xfrm>
-            <a:off x="6339840" y="3962399"/>
-            <a:ext cx="4450080" cy="0"/>
+            <a:off x="914400" y="3200400"/>
+            <a:ext cx="6583679" cy="0"/>
           </a:xfrm>
           <a:prstGeom prst="line">
             <a:avLst/>
           </a:prstGeom>
-          <a:ln w="25400">
+          <a:ln w="16510">
             <a:solidFill>
-              <a:srgbClr val="8EDBD4"/>
+              <a:srgbClr val="B4C7D2"/>
             </a:solidFill>
-            <a:headEnd type="none" w="med" len="med"/>
-            <a:tailEnd type="triangle" w="med" len="med"/>
+            <a:prstDash val="dash"/>
           </a:ln>
           <a:effectLst/>
         </p:spPr>
       </p:cxnSp>
-      <p:cxnSp>
-        <p:nvCxnSpPr>
-          <p:cNvPr id="6" name="arrow5" descr="sci-ppt:C2-E12-005"/>
-          <p:cNvCxnSpPr/>
+      <p:sp>
+        <p:nvSpPr>
+          <p:cNvPr id="39" name="C2-E12 ellipse 37" descr="sci-ppt:o037"/>
+          <p:cNvSpPr/>
           <p:nvPr/>
-        </p:nvCxnSpPr>
-        <p:spPr>
-          <a:xfrm flipV="1">
-            <a:off x="6339840" y="1524000"/>
-            <a:ext cx="0" cy="2438399"/>
-          </a:xfrm>
-          <a:prstGeom prst="line">
+        </p:nvSpPr>
+        <p:spPr>
+          <a:xfrm>
+            <a:off x="3266636" y="3127248"/>
+            <a:ext cx="146304" cy="146304"/>
+          </a:xfrm>
+          <a:prstGeom prst="ellipse">
             <a:avLst/>
           </a:prstGeom>
-          <a:ln w="25400">
+          <a:solidFill>
+            <a:srgbClr val="F2B880"/>
+          </a:solidFill>
+          <a:ln w="12700">
             <a:solidFill>
-              <a:srgbClr val="8EDBD4"/>
+              <a:srgbClr val="F2B880"/>
             </a:solidFill>
-            <a:headEnd type="none" w="med" len="med"/>
-            <a:tailEnd type="triangle" w="med" len="med"/>
           </a:ln>
           <a:effectLst/>
         </p:spPr>
-      </p:cxnSp>
-      <p:sp>
-        <p:nvSpPr>
-          <p:cNvPr id="7" name="text6" descr="sci-ppt:C2-E12-006"/>
+        <p:txBody>
+          <a:bodyPr rtlCol="0" anchor="ctr"/>
+          <a:lstStyle/>
+          <a:p>
+            <a:pPr algn="ctr"/>
+          </a:p>
+        </p:txBody>
+      </p:sp>
+      <p:sp>
+        <p:nvSpPr>
+          <p:cNvPr id="40" name="C2-E12 text 38" descr="sci-ppt:o038"/>
           <p:cNvSpPr txBox="1"/>
           <p:nvPr/>
         </p:nvSpPr>
         <p:spPr>
           <a:xfrm>
-            <a:off x="9814560" y="4084320"/>
-            <a:ext cx="1828800" cy="321259"/>
+            <a:off x="3449516" y="3273552"/>
+            <a:ext cx="2011680" cy="239395"/>
           </a:xfrm>
           <a:prstGeom prst="rect">
             <a:avLst/>
@@ -3274,7 +4811,7 @@
           <a:effectLst/>
         </p:spPr>
         <p:txBody>
-          <a:bodyPr wrap="none" lIns="27432" rIns="27432" tIns="18288" bIns="18288" anchor="ctr">
+          <a:bodyPr wrap="none" lIns="18288" rIns="18288" tIns="18288" bIns="18288" anchor="t">
             <a:spAutoFit/>
           </a:bodyPr>
           <a:lstStyle/>
@@ -3285,39 +4822,271 @@
               </a:spcAft>
             </a:pPr>
             <a:r>
-              <a:rPr sz="1632" b="0" i="0">
+              <a:rPr sz="1250" b="0" i="0">
+                <a:solidFill>
+                  <a:srgbClr val="F2B880"/>
+                </a:solidFill>
+                <a:latin typeface="Arial"/>
+              </a:rPr>
+              <a:t>1 bar at 302.1 K</a:t>
+            </a:r>
+          </a:p>
+        </p:txBody>
+      </p:sp>
+      <p:sp>
+        <p:nvSpPr>
+          <p:cNvPr id="41" name="C2-E12 ellipse 39" descr="sci-ppt:o039"/>
+          <p:cNvSpPr/>
+          <p:nvPr/>
+        </p:nvSpPr>
+        <p:spPr>
+          <a:xfrm>
+            <a:off x="2284171" y="3336180"/>
+            <a:ext cx="146304" cy="146304"/>
+          </a:xfrm>
+          <a:prstGeom prst="ellipse">
+            <a:avLst/>
+          </a:prstGeom>
+          <a:solidFill>
+            <a:srgbClr val="7FC8F8"/>
+          </a:solidFill>
+          <a:ln w="12700">
+            <a:solidFill>
+              <a:srgbClr val="7FC8F8"/>
+            </a:solidFill>
+          </a:ln>
+          <a:effectLst/>
+        </p:spPr>
+        <p:txBody>
+          <a:bodyPr rtlCol="0" anchor="ctr"/>
+          <a:lstStyle/>
+          <a:p>
+            <a:pPr algn="ctr"/>
+          </a:p>
+        </p:txBody>
+      </p:sp>
+      <p:sp>
+        <p:nvSpPr>
+          <p:cNvPr id="42" name="C2-E12 text 40" descr="sci-ppt:o040"/>
+          <p:cNvSpPr txBox="1"/>
+          <p:nvPr/>
+        </p:nvSpPr>
+        <p:spPr>
+          <a:xfrm>
+            <a:off x="2467051" y="2997852"/>
+            <a:ext cx="1828800" cy="231648"/>
+          </a:xfrm>
+          <a:prstGeom prst="rect">
+            <a:avLst/>
+          </a:prstGeom>
+          <a:noFill/>
+          <a:effectLst/>
+        </p:spPr>
+        <p:txBody>
+          <a:bodyPr wrap="none" lIns="18288" rIns="18288" tIns="18288" bIns="18288" anchor="t">
+            <a:spAutoFit/>
+          </a:bodyPr>
+          <a:lstStyle/>
+          <a:p>
+            <a:pPr algn="l">
+              <a:spcAft>
+                <a:spcPts val="0"/>
+              </a:spcAft>
+            </a:pPr>
+            <a:r>
+              <a:rPr sz="1200" b="0" i="0">
+                <a:solidFill>
+                  <a:srgbClr val="7FC8F8"/>
+                </a:solidFill>
+                <a:latin typeface="Arial"/>
+              </a:rPr>
+              <a:t>293 K: 0.71 bar</a:t>
+            </a:r>
+          </a:p>
+        </p:txBody>
+      </p:sp>
+      <p:sp>
+        <p:nvSpPr>
+          <p:cNvPr id="43" name="C2-E12 ellipse 41" descr="sci-ppt:o041"/>
+          <p:cNvSpPr/>
+          <p:nvPr/>
+        </p:nvSpPr>
+        <p:spPr>
+          <a:xfrm>
+            <a:off x="5576011" y="2688124"/>
+            <a:ext cx="146304" cy="146304"/>
+          </a:xfrm>
+          <a:prstGeom prst="ellipse">
+            <a:avLst/>
+          </a:prstGeom>
+          <a:solidFill>
+            <a:srgbClr val="F28BA0"/>
+          </a:solidFill>
+          <a:ln w="12700">
+            <a:solidFill>
+              <a:srgbClr val="F28BA0"/>
+            </a:solidFill>
+          </a:ln>
+          <a:effectLst/>
+        </p:spPr>
+        <p:txBody>
+          <a:bodyPr rtlCol="0" anchor="ctr"/>
+          <a:lstStyle/>
+          <a:p>
+            <a:pPr algn="ctr"/>
+          </a:p>
+        </p:txBody>
+      </p:sp>
+      <p:sp>
+        <p:nvSpPr>
+          <p:cNvPr id="44" name="C2-E12 text 42" descr="sci-ppt:o042"/>
+          <p:cNvSpPr txBox="1"/>
+          <p:nvPr/>
+        </p:nvSpPr>
+        <p:spPr>
+          <a:xfrm>
+            <a:off x="5758891" y="2349796"/>
+            <a:ext cx="1828800" cy="231648"/>
+          </a:xfrm>
+          <a:prstGeom prst="rect">
+            <a:avLst/>
+          </a:prstGeom>
+          <a:noFill/>
+          <a:effectLst/>
+        </p:spPr>
+        <p:txBody>
+          <a:bodyPr wrap="none" lIns="18288" rIns="18288" tIns="18288" bIns="18288" anchor="t">
+            <a:spAutoFit/>
+          </a:bodyPr>
+          <a:lstStyle/>
+          <a:p>
+            <a:pPr algn="l">
+              <a:spcAft>
+                <a:spcPts val="0"/>
+              </a:spcAft>
+            </a:pPr>
+            <a:r>
+              <a:rPr sz="1200" b="0" i="0">
+                <a:solidFill>
+                  <a:srgbClr val="F28BA0"/>
+                </a:solidFill>
+                <a:latin typeface="Arial"/>
+              </a:rPr>
+              <a:t>323 K: 2.05 bar</a:t>
+            </a:r>
+          </a:p>
+        </p:txBody>
+      </p:sp>
+      <p:sp>
+        <p:nvSpPr>
+          <p:cNvPr id="45" name="C2-E12 round_rect 43" descr="sci-ppt:o043"/>
+          <p:cNvSpPr/>
+          <p:nvPr/>
+        </p:nvSpPr>
+        <p:spPr>
+          <a:xfrm>
+            <a:off x="7772400" y="1371600"/>
+            <a:ext cx="4069080" cy="3657600"/>
+          </a:xfrm>
+          <a:prstGeom prst="roundRect">
+            <a:avLst/>
+          </a:prstGeom>
+          <a:solidFill>
+            <a:srgbClr val="213E4B"/>
+          </a:solidFill>
+          <a:ln w="20320">
+            <a:solidFill>
+              <a:srgbClr val="8EDBD4"/>
+            </a:solidFill>
+          </a:ln>
+          <a:effectLst/>
+        </p:spPr>
+        <p:txBody>
+          <a:bodyPr rtlCol="0" anchor="ctr"/>
+          <a:lstStyle/>
+          <a:p>
+            <a:pPr algn="ctr"/>
+          </a:p>
+        </p:txBody>
+      </p:sp>
+      <p:sp>
+        <p:nvSpPr>
+          <p:cNvPr id="46" name="C2-E12 text 44" descr="sci-ppt:o044"/>
+          <p:cNvSpPr txBox="1"/>
+          <p:nvPr/>
+        </p:nvSpPr>
+        <p:spPr>
+          <a:xfrm>
+            <a:off x="7882127" y="1426464"/>
+            <a:ext cx="3849624" cy="254889"/>
+          </a:xfrm>
+          <a:prstGeom prst="rect">
+            <a:avLst/>
+          </a:prstGeom>
+          <a:noFill/>
+          <a:effectLst/>
+        </p:spPr>
+        <p:txBody>
+          <a:bodyPr wrap="none" lIns="18288" rIns="18288" tIns="18288" bIns="18288" anchor="t">
+            <a:spAutoFit/>
+          </a:bodyPr>
+          <a:lstStyle/>
+          <a:p>
+            <a:pPr algn="l">
+              <a:spcAft>
+                <a:spcPts val="0"/>
+              </a:spcAft>
+            </a:pPr>
+            <a:r>
+              <a:rPr sz="1350" b="1" i="0">
+                <a:solidFill>
+                  <a:srgbClr val="8EDBD4"/>
+                </a:solidFill>
+                <a:latin typeface="Arial"/>
+              </a:rPr>
+              <a:t>What the curve says</a:t>
+            </a:r>
+          </a:p>
+        </p:txBody>
+      </p:sp>
+      <p:sp>
+        <p:nvSpPr>
+          <p:cNvPr id="47" name="C2-E12 text 45" descr="sci-ppt:o045"/>
+          <p:cNvSpPr txBox="1"/>
+          <p:nvPr/>
+        </p:nvSpPr>
+        <p:spPr>
+          <a:xfrm>
+            <a:off x="7909560" y="1828800"/>
+            <a:ext cx="3840480" cy="433070"/>
+          </a:xfrm>
+          <a:prstGeom prst="rect">
+            <a:avLst/>
+          </a:prstGeom>
+          <a:noFill/>
+          <a:effectLst/>
+        </p:spPr>
+        <p:txBody>
+          <a:bodyPr wrap="none" lIns="18288" rIns="18288" tIns="18288" bIns="18288" anchor="t">
+            <a:spAutoFit/>
+          </a:bodyPr>
+          <a:lstStyle/>
+          <a:p>
+            <a:pPr algn="l">
+              <a:spcAft>
+                <a:spcPts val="0"/>
+              </a:spcAft>
+            </a:pPr>
+            <a:r>
+              <a:rPr sz="1250" b="1" i="0">
                 <a:solidFill>
                   <a:srgbClr val="E7F0F3"/>
                 </a:solidFill>
                 <a:latin typeface="Arial"/>
               </a:rPr>
-              <a:t>Temperature</a:t>
-            </a:r>
-          </a:p>
-        </p:txBody>
-      </p:sp>
-      <p:sp>
-        <p:nvSpPr>
-          <p:cNvPr id="8" name="text7" descr="sci-ppt:C2-E12-007"/>
-          <p:cNvSpPr txBox="1"/>
-          <p:nvPr/>
-        </p:nvSpPr>
-        <p:spPr>
-          <a:xfrm>
-            <a:off x="6217920" y="1158240"/>
-            <a:ext cx="3657600" cy="321259"/>
-          </a:xfrm>
-          <a:prstGeom prst="rect">
-            <a:avLst/>
-          </a:prstGeom>
-          <a:noFill/>
-          <a:effectLst/>
-        </p:spPr>
-        <p:txBody>
-          <a:bodyPr wrap="none" lIns="27432" rIns="27432" tIns="18288" bIns="18288" anchor="ctr">
-            <a:spAutoFit/>
-          </a:bodyPr>
-          <a:lstStyle/>
+              <a:t>log₁₀(p/10⁵ Pa) = 4.2063 − 1103.454 K/(T −</a:t>
+            </a:r>
+          </a:p>
           <a:p>
             <a:pPr algn="l">
               <a:spcAft>
@@ -3325,687 +5094,275 @@
               </a:spcAft>
             </a:pPr>
             <a:r>
-              <a:rPr sz="1632" b="0" i="0">
+              <a:rPr sz="1250" b="1" i="0">
                 <a:solidFill>
                   <a:srgbClr val="E7F0F3"/>
                 </a:solidFill>
                 <a:latin typeface="Arial"/>
               </a:rPr>
-              <a:t>Saturation pressure</a:t>
-            </a:r>
-          </a:p>
-        </p:txBody>
-      </p:sp>
-      <p:cxnSp>
-        <p:nvCxnSpPr>
-          <p:cNvPr id="9" name="line8" descr="sci-ppt:C2-E12-008"/>
-          <p:cNvCxnSpPr/>
+              <a:t>39.77 K)</a:t>
+            </a:r>
+          </a:p>
+        </p:txBody>
+      </p:sp>
+      <p:sp>
+        <p:nvSpPr>
+          <p:cNvPr id="48" name="C2-E12 text 46" descr="sci-ppt:o046"/>
+          <p:cNvSpPr txBox="1"/>
           <p:nvPr/>
-        </p:nvCxnSpPr>
-        <p:spPr>
-          <a:xfrm flipV="1">
-            <a:off x="6400800" y="3838041"/>
-            <a:ext cx="142239" cy="2439"/>
-          </a:xfrm>
-          <a:prstGeom prst="line">
+        </p:nvSpPr>
+        <p:spPr>
+          <a:xfrm>
+            <a:off x="8110728" y="2651760"/>
+            <a:ext cx="3639312" cy="239395"/>
+          </a:xfrm>
+          <a:prstGeom prst="rect">
             <a:avLst/>
           </a:prstGeom>
-          <a:ln w="25400">
+          <a:noFill/>
+          <a:effectLst/>
+        </p:spPr>
+        <p:txBody>
+          <a:bodyPr wrap="none" lIns="18288" rIns="18288" tIns="18288" bIns="18288" anchor="t">
+            <a:spAutoFit/>
+          </a:bodyPr>
+          <a:lstStyle/>
+          <a:p>
+            <a:pPr algn="l">
+              <a:spcAft>
+                <a:spcPts val="0"/>
+              </a:spcAft>
+            </a:pPr>
+            <a:r>
+              <a:rPr sz="1250" b="0" i="0">
+                <a:solidFill>
+                  <a:srgbClr val="E7F0F3"/>
+                </a:solidFill>
+                <a:latin typeface="Arial"/>
+              </a:rPr>
+              <a:t>Valid only for 282.82 K ≤ T ≤ 337.94 K.</a:t>
+            </a:r>
+          </a:p>
+        </p:txBody>
+      </p:sp>
+      <p:sp>
+        <p:nvSpPr>
+          <p:cNvPr id="49" name="C2-E12 ellipse 47" descr="sci-ppt:o047"/>
+          <p:cNvSpPr/>
+          <p:nvPr/>
+        </p:nvSpPr>
+        <p:spPr>
+          <a:xfrm>
+            <a:off x="7941564" y="2709037"/>
+            <a:ext cx="82296" cy="82296"/>
+          </a:xfrm>
+          <a:prstGeom prst="ellipse">
+            <a:avLst/>
+          </a:prstGeom>
+          <a:solidFill>
+            <a:srgbClr val="8EDBD4"/>
+          </a:solidFill>
+          <a:ln w="12700">
             <a:solidFill>
               <a:srgbClr val="8EDBD4"/>
             </a:solidFill>
           </a:ln>
           <a:effectLst/>
         </p:spPr>
-      </p:cxnSp>
-      <p:cxnSp>
-        <p:nvCxnSpPr>
-          <p:cNvPr id="10" name="line9" descr="sci-ppt:C2-E12-009"/>
-          <p:cNvCxnSpPr/>
+        <p:txBody>
+          <a:bodyPr rtlCol="0" anchor="ctr"/>
+          <a:lstStyle/>
+          <a:p>
+            <a:pPr algn="ctr"/>
+          </a:p>
+        </p:txBody>
+      </p:sp>
+      <p:sp>
+        <p:nvSpPr>
+          <p:cNvPr id="50" name="C2-E12 text 48" descr="sci-ppt:o048"/>
+          <p:cNvSpPr txBox="1"/>
           <p:nvPr/>
-        </p:nvCxnSpPr>
-        <p:spPr>
-          <a:xfrm flipV="1">
-            <a:off x="6543039" y="3830726"/>
-            <a:ext cx="142241" cy="7315"/>
-          </a:xfrm>
-          <a:prstGeom prst="line">
+        </p:nvSpPr>
+        <p:spPr>
+          <a:xfrm>
+            <a:off x="8110728" y="2936875"/>
+            <a:ext cx="3639312" cy="433070"/>
+          </a:xfrm>
+          <a:prstGeom prst="rect">
             <a:avLst/>
           </a:prstGeom>
-          <a:ln w="25400">
+          <a:noFill/>
+          <a:effectLst/>
+        </p:spPr>
+        <p:txBody>
+          <a:bodyPr wrap="none" lIns="18288" rIns="18288" tIns="18288" bIns="18288" anchor="t">
+            <a:spAutoFit/>
+          </a:bodyPr>
+          <a:lstStyle/>
+          <a:p>
+            <a:pPr algn="l">
+              <a:spcAft>
+                <a:spcPts val="0"/>
+              </a:spcAft>
+            </a:pPr>
+            <a:r>
+              <a:rPr sz="1250" b="0" i="0">
+                <a:solidFill>
+                  <a:srgbClr val="E7F0F3"/>
+                </a:solidFill>
+                <a:latin typeface="Arial"/>
+              </a:rPr>
+              <a:t>It gives the equilibrium vapor pressure of</a:t>
+            </a:r>
+          </a:p>
+          <a:p>
+            <a:pPr algn="l">
+              <a:spcAft>
+                <a:spcPts val="0"/>
+              </a:spcAft>
+            </a:pPr>
+            <a:r>
+              <a:rPr sz="1250" b="0" i="0">
+                <a:solidFill>
+                  <a:srgbClr val="E7F0F3"/>
+                </a:solidFill>
+                <a:latin typeface="Arial"/>
+              </a:rPr>
+              <a:t>bulk liquid.</a:t>
+            </a:r>
+          </a:p>
+        </p:txBody>
+      </p:sp>
+      <p:sp>
+        <p:nvSpPr>
+          <p:cNvPr id="51" name="C2-E12 ellipse 49" descr="sci-ppt:o049"/>
+          <p:cNvSpPr/>
+          <p:nvPr/>
+        </p:nvSpPr>
+        <p:spPr>
+          <a:xfrm>
+            <a:off x="7941564" y="2994152"/>
+            <a:ext cx="82296" cy="82296"/>
+          </a:xfrm>
+          <a:prstGeom prst="ellipse">
+            <a:avLst/>
+          </a:prstGeom>
+          <a:solidFill>
+            <a:srgbClr val="8EDBD4"/>
+          </a:solidFill>
+          <a:ln w="12700">
             <a:solidFill>
               <a:srgbClr val="8EDBD4"/>
             </a:solidFill>
           </a:ln>
           <a:effectLst/>
         </p:spPr>
-      </p:cxnSp>
-      <p:cxnSp>
-        <p:nvCxnSpPr>
-          <p:cNvPr id="11" name="line10" descr="sci-ppt:C2-E12-010"/>
-          <p:cNvCxnSpPr/>
+        <p:txBody>
+          <a:bodyPr rtlCol="0" anchor="ctr"/>
+          <a:lstStyle/>
+          <a:p>
+            <a:pPr algn="ctr"/>
+          </a:p>
+        </p:txBody>
+      </p:sp>
+      <p:sp>
+        <p:nvSpPr>
+          <p:cNvPr id="52" name="C2-E12 text 50" descr="sci-ppt:o050"/>
+          <p:cNvSpPr txBox="1"/>
           <p:nvPr/>
-        </p:nvCxnSpPr>
-        <p:spPr>
-          <a:xfrm flipV="1">
-            <a:off x="6685280" y="3818534"/>
-            <a:ext cx="142240" cy="12192"/>
-          </a:xfrm>
-          <a:prstGeom prst="line">
+        </p:nvSpPr>
+        <p:spPr>
+          <a:xfrm>
+            <a:off x="8110728" y="3415664"/>
+            <a:ext cx="3639312" cy="433070"/>
+          </a:xfrm>
+          <a:prstGeom prst="rect">
             <a:avLst/>
           </a:prstGeom>
-          <a:ln w="25400">
+          <a:noFill/>
+          <a:effectLst/>
+        </p:spPr>
+        <p:txBody>
+          <a:bodyPr wrap="none" lIns="18288" rIns="18288" tIns="18288" bIns="18288" anchor="t">
+            <a:spAutoFit/>
+          </a:bodyPr>
+          <a:lstStyle/>
+          <a:p>
+            <a:pPr algn="l">
+              <a:spcAft>
+                <a:spcPts val="0"/>
+              </a:spcAft>
+            </a:pPr>
+            <a:r>
+              <a:rPr sz="1250" b="0" i="0">
+                <a:solidFill>
+                  <a:srgbClr val="E7F0F3"/>
+                </a:solidFill>
+                <a:latin typeface="Arial"/>
+              </a:rPr>
+              <a:t>Reaching it does not by itself start a</a:t>
+            </a:r>
+          </a:p>
+          <a:p>
+            <a:pPr algn="l">
+              <a:spcAft>
+                <a:spcPts val="0"/>
+              </a:spcAft>
+            </a:pPr>
+            <a:r>
+              <a:rPr sz="1250" b="0" i="0">
+                <a:solidFill>
+                  <a:srgbClr val="E7F0F3"/>
+                </a:solidFill>
+                <a:latin typeface="Arial"/>
+              </a:rPr>
+              <a:t>bubble: nucleation is a separate step.</a:t>
+            </a:r>
+          </a:p>
+        </p:txBody>
+      </p:sp>
+      <p:sp>
+        <p:nvSpPr>
+          <p:cNvPr id="53" name="C2-E12 ellipse 51" descr="sci-ppt:o051"/>
+          <p:cNvSpPr/>
+          <p:nvPr/>
+        </p:nvSpPr>
+        <p:spPr>
+          <a:xfrm>
+            <a:off x="7941564" y="3472941"/>
+            <a:ext cx="82296" cy="82296"/>
+          </a:xfrm>
+          <a:prstGeom prst="ellipse">
+            <a:avLst/>
+          </a:prstGeom>
+          <a:solidFill>
+            <a:srgbClr val="8EDBD4"/>
+          </a:solidFill>
+          <a:ln w="12700">
             <a:solidFill>
               <a:srgbClr val="8EDBD4"/>
             </a:solidFill>
           </a:ln>
           <a:effectLst/>
         </p:spPr>
-      </p:cxnSp>
-      <p:cxnSp>
-        <p:nvCxnSpPr>
-          <p:cNvPr id="12" name="line11" descr="sci-ppt:C2-E12-011"/>
-          <p:cNvCxnSpPr/>
-          <p:nvPr/>
-        </p:nvCxnSpPr>
-        <p:spPr>
-          <a:xfrm flipV="1">
-            <a:off x="6827520" y="3801465"/>
-            <a:ext cx="142240" cy="17069"/>
-          </a:xfrm>
-          <a:prstGeom prst="line">
-            <a:avLst/>
-          </a:prstGeom>
-          <a:ln w="25400">
-            <a:solidFill>
-              <a:srgbClr val="8EDBD4"/>
-            </a:solidFill>
-          </a:ln>
-          <a:effectLst/>
-        </p:spPr>
-      </p:cxnSp>
-      <p:cxnSp>
-        <p:nvCxnSpPr>
-          <p:cNvPr id="13" name="line12" descr="sci-ppt:C2-E12-012"/>
-          <p:cNvCxnSpPr/>
-          <p:nvPr/>
-        </p:nvCxnSpPr>
-        <p:spPr>
-          <a:xfrm flipV="1">
-            <a:off x="6969760" y="3779520"/>
-            <a:ext cx="142240" cy="21945"/>
-          </a:xfrm>
-          <a:prstGeom prst="line">
-            <a:avLst/>
-          </a:prstGeom>
-          <a:ln w="25400">
-            <a:solidFill>
-              <a:srgbClr val="8EDBD4"/>
-            </a:solidFill>
-          </a:ln>
-          <a:effectLst/>
-        </p:spPr>
-      </p:cxnSp>
-      <p:cxnSp>
-        <p:nvCxnSpPr>
-          <p:cNvPr id="14" name="line13" descr="sci-ppt:C2-E12-013"/>
-          <p:cNvCxnSpPr/>
-          <p:nvPr/>
-        </p:nvCxnSpPr>
-        <p:spPr>
-          <a:xfrm flipV="1">
-            <a:off x="7112000" y="3752697"/>
-            <a:ext cx="142240" cy="26823"/>
-          </a:xfrm>
-          <a:prstGeom prst="line">
-            <a:avLst/>
-          </a:prstGeom>
-          <a:ln w="25400">
-            <a:solidFill>
-              <a:srgbClr val="8EDBD4"/>
-            </a:solidFill>
-          </a:ln>
-          <a:effectLst/>
-        </p:spPr>
-      </p:cxnSp>
-      <p:cxnSp>
-        <p:nvCxnSpPr>
-          <p:cNvPr id="15" name="line14" descr="sci-ppt:C2-E12-014"/>
-          <p:cNvCxnSpPr/>
-          <p:nvPr/>
-        </p:nvCxnSpPr>
-        <p:spPr>
-          <a:xfrm flipV="1">
-            <a:off x="7254240" y="3720998"/>
-            <a:ext cx="142240" cy="31699"/>
-          </a:xfrm>
-          <a:prstGeom prst="line">
-            <a:avLst/>
-          </a:prstGeom>
-          <a:ln w="25400">
-            <a:solidFill>
-              <a:srgbClr val="8EDBD4"/>
-            </a:solidFill>
-          </a:ln>
-          <a:effectLst/>
-        </p:spPr>
-      </p:cxnSp>
-      <p:cxnSp>
-        <p:nvCxnSpPr>
-          <p:cNvPr id="16" name="line15" descr="sci-ppt:C2-E12-015"/>
-          <p:cNvCxnSpPr/>
-          <p:nvPr/>
-        </p:nvCxnSpPr>
-        <p:spPr>
-          <a:xfrm flipV="1">
-            <a:off x="7396480" y="3684422"/>
-            <a:ext cx="142240" cy="36576"/>
-          </a:xfrm>
-          <a:prstGeom prst="line">
-            <a:avLst/>
-          </a:prstGeom>
-          <a:ln w="25400">
-            <a:solidFill>
-              <a:srgbClr val="8EDBD4"/>
-            </a:solidFill>
-          </a:ln>
-          <a:effectLst/>
-        </p:spPr>
-      </p:cxnSp>
-      <p:cxnSp>
-        <p:nvCxnSpPr>
-          <p:cNvPr id="17" name="line16" descr="sci-ppt:C2-E12-016"/>
-          <p:cNvCxnSpPr/>
-          <p:nvPr/>
-        </p:nvCxnSpPr>
-        <p:spPr>
-          <a:xfrm flipV="1">
-            <a:off x="7538720" y="3642969"/>
-            <a:ext cx="142240" cy="41453"/>
-          </a:xfrm>
-          <a:prstGeom prst="line">
-            <a:avLst/>
-          </a:prstGeom>
-          <a:ln w="25400">
-            <a:solidFill>
-              <a:srgbClr val="8EDBD4"/>
-            </a:solidFill>
-          </a:ln>
-          <a:effectLst/>
-        </p:spPr>
-      </p:cxnSp>
-      <p:cxnSp>
-        <p:nvCxnSpPr>
-          <p:cNvPr id="18" name="line17" descr="sci-ppt:C2-E12-017"/>
-          <p:cNvCxnSpPr/>
-          <p:nvPr/>
-        </p:nvCxnSpPr>
-        <p:spPr>
-          <a:xfrm flipV="1">
-            <a:off x="7680960" y="3596640"/>
-            <a:ext cx="142240" cy="46329"/>
-          </a:xfrm>
-          <a:prstGeom prst="line">
-            <a:avLst/>
-          </a:prstGeom>
-          <a:ln w="25400">
-            <a:solidFill>
-              <a:srgbClr val="8EDBD4"/>
-            </a:solidFill>
-          </a:ln>
-          <a:effectLst/>
-        </p:spPr>
-      </p:cxnSp>
-      <p:cxnSp>
-        <p:nvCxnSpPr>
-          <p:cNvPr id="19" name="line18" descr="sci-ppt:C2-E12-018"/>
-          <p:cNvCxnSpPr/>
-          <p:nvPr/>
-        </p:nvCxnSpPr>
-        <p:spPr>
-          <a:xfrm flipV="1">
-            <a:off x="7823200" y="3545433"/>
-            <a:ext cx="142240" cy="51207"/>
-          </a:xfrm>
-          <a:prstGeom prst="line">
-            <a:avLst/>
-          </a:prstGeom>
-          <a:ln w="25400">
-            <a:solidFill>
-              <a:srgbClr val="8EDBD4"/>
-            </a:solidFill>
-          </a:ln>
-          <a:effectLst/>
-        </p:spPr>
-      </p:cxnSp>
-      <p:cxnSp>
-        <p:nvCxnSpPr>
-          <p:cNvPr id="20" name="line19" descr="sci-ppt:C2-E12-019"/>
-          <p:cNvCxnSpPr/>
-          <p:nvPr/>
-        </p:nvCxnSpPr>
-        <p:spPr>
-          <a:xfrm flipV="1">
-            <a:off x="7965440" y="3489350"/>
-            <a:ext cx="142240" cy="56083"/>
-          </a:xfrm>
-          <a:prstGeom prst="line">
-            <a:avLst/>
-          </a:prstGeom>
-          <a:ln w="25400">
-            <a:solidFill>
-              <a:srgbClr val="8EDBD4"/>
-            </a:solidFill>
-          </a:ln>
-          <a:effectLst/>
-        </p:spPr>
-      </p:cxnSp>
-      <p:cxnSp>
-        <p:nvCxnSpPr>
-          <p:cNvPr id="21" name="line20" descr="sci-ppt:C2-E12-020"/>
-          <p:cNvCxnSpPr/>
-          <p:nvPr/>
-        </p:nvCxnSpPr>
-        <p:spPr>
-          <a:xfrm flipV="1">
-            <a:off x="8107680" y="3428390"/>
-            <a:ext cx="142240" cy="60960"/>
-          </a:xfrm>
-          <a:prstGeom prst="line">
-            <a:avLst/>
-          </a:prstGeom>
-          <a:ln w="25400">
-            <a:solidFill>
-              <a:srgbClr val="8EDBD4"/>
-            </a:solidFill>
-          </a:ln>
-          <a:effectLst/>
-        </p:spPr>
-      </p:cxnSp>
-      <p:cxnSp>
-        <p:nvCxnSpPr>
-          <p:cNvPr id="22" name="line21" descr="sci-ppt:C2-E12-021"/>
-          <p:cNvCxnSpPr/>
-          <p:nvPr/>
-        </p:nvCxnSpPr>
-        <p:spPr>
-          <a:xfrm flipV="1">
-            <a:off x="8249920" y="3362553"/>
-            <a:ext cx="142240" cy="65837"/>
-          </a:xfrm>
-          <a:prstGeom prst="line">
-            <a:avLst/>
-          </a:prstGeom>
-          <a:ln w="25400">
-            <a:solidFill>
-              <a:srgbClr val="8EDBD4"/>
-            </a:solidFill>
-          </a:ln>
-          <a:effectLst/>
-        </p:spPr>
-      </p:cxnSp>
-      <p:cxnSp>
-        <p:nvCxnSpPr>
-          <p:cNvPr id="23" name="line22" descr="sci-ppt:C2-E12-022"/>
-          <p:cNvCxnSpPr/>
-          <p:nvPr/>
-        </p:nvCxnSpPr>
-        <p:spPr>
-          <a:xfrm flipV="1">
-            <a:off x="8392160" y="3291840"/>
-            <a:ext cx="142240" cy="70713"/>
-          </a:xfrm>
-          <a:prstGeom prst="line">
-            <a:avLst/>
-          </a:prstGeom>
-          <a:ln w="25400">
-            <a:solidFill>
-              <a:srgbClr val="8EDBD4"/>
-            </a:solidFill>
-          </a:ln>
-          <a:effectLst/>
-        </p:spPr>
-      </p:cxnSp>
-      <p:cxnSp>
-        <p:nvCxnSpPr>
-          <p:cNvPr id="24" name="line23" descr="sci-ppt:C2-E12-023"/>
-          <p:cNvCxnSpPr/>
-          <p:nvPr/>
-        </p:nvCxnSpPr>
-        <p:spPr>
-          <a:xfrm flipV="1">
-            <a:off x="8534400" y="3216249"/>
-            <a:ext cx="142240" cy="75591"/>
-          </a:xfrm>
-          <a:prstGeom prst="line">
-            <a:avLst/>
-          </a:prstGeom>
-          <a:ln w="25400">
-            <a:solidFill>
-              <a:srgbClr val="8EDBD4"/>
-            </a:solidFill>
-          </a:ln>
-          <a:effectLst/>
-        </p:spPr>
-      </p:cxnSp>
-      <p:cxnSp>
-        <p:nvCxnSpPr>
-          <p:cNvPr id="25" name="line24" descr="sci-ppt:C2-E12-024"/>
-          <p:cNvCxnSpPr/>
-          <p:nvPr/>
-        </p:nvCxnSpPr>
-        <p:spPr>
-          <a:xfrm flipV="1">
-            <a:off x="8676640" y="3135782"/>
-            <a:ext cx="142240" cy="80467"/>
-          </a:xfrm>
-          <a:prstGeom prst="line">
-            <a:avLst/>
-          </a:prstGeom>
-          <a:ln w="25400">
-            <a:solidFill>
-              <a:srgbClr val="8EDBD4"/>
-            </a:solidFill>
-          </a:ln>
-          <a:effectLst/>
-        </p:spPr>
-      </p:cxnSp>
-      <p:cxnSp>
-        <p:nvCxnSpPr>
-          <p:cNvPr id="26" name="line25" descr="sci-ppt:C2-E12-025"/>
-          <p:cNvCxnSpPr/>
-          <p:nvPr/>
-        </p:nvCxnSpPr>
-        <p:spPr>
-          <a:xfrm flipV="1">
-            <a:off x="8818880" y="3050438"/>
-            <a:ext cx="142240" cy="85344"/>
-          </a:xfrm>
-          <a:prstGeom prst="line">
-            <a:avLst/>
-          </a:prstGeom>
-          <a:ln w="25400">
-            <a:solidFill>
-              <a:srgbClr val="8EDBD4"/>
-            </a:solidFill>
-          </a:ln>
-          <a:effectLst/>
-        </p:spPr>
-      </p:cxnSp>
-      <p:cxnSp>
-        <p:nvCxnSpPr>
-          <p:cNvPr id="27" name="line26" descr="sci-ppt:C2-E12-026"/>
-          <p:cNvCxnSpPr/>
-          <p:nvPr/>
-        </p:nvCxnSpPr>
-        <p:spPr>
-          <a:xfrm flipV="1">
-            <a:off x="8961120" y="2960217"/>
-            <a:ext cx="142240" cy="90221"/>
-          </a:xfrm>
-          <a:prstGeom prst="line">
-            <a:avLst/>
-          </a:prstGeom>
-          <a:ln w="25400">
-            <a:solidFill>
-              <a:srgbClr val="8EDBD4"/>
-            </a:solidFill>
-          </a:ln>
-          <a:effectLst/>
-        </p:spPr>
-      </p:cxnSp>
-      <p:cxnSp>
-        <p:nvCxnSpPr>
-          <p:cNvPr id="28" name="line27" descr="sci-ppt:C2-E12-027"/>
-          <p:cNvCxnSpPr/>
-          <p:nvPr/>
-        </p:nvCxnSpPr>
-        <p:spPr>
-          <a:xfrm flipV="1">
-            <a:off x="9103360" y="2865120"/>
-            <a:ext cx="142240" cy="95097"/>
-          </a:xfrm>
-          <a:prstGeom prst="line">
-            <a:avLst/>
-          </a:prstGeom>
-          <a:ln w="25400">
-            <a:solidFill>
-              <a:srgbClr val="8EDBD4"/>
-            </a:solidFill>
-          </a:ln>
-          <a:effectLst/>
-        </p:spPr>
-      </p:cxnSp>
-      <p:cxnSp>
-        <p:nvCxnSpPr>
-          <p:cNvPr id="29" name="line28" descr="sci-ppt:C2-E12-028"/>
-          <p:cNvCxnSpPr/>
-          <p:nvPr/>
-        </p:nvCxnSpPr>
-        <p:spPr>
-          <a:xfrm flipV="1">
-            <a:off x="9245600" y="2765145"/>
-            <a:ext cx="142240" cy="99975"/>
-          </a:xfrm>
-          <a:prstGeom prst="line">
-            <a:avLst/>
-          </a:prstGeom>
-          <a:ln w="25400">
-            <a:solidFill>
-              <a:srgbClr val="8EDBD4"/>
-            </a:solidFill>
-          </a:ln>
-          <a:effectLst/>
-        </p:spPr>
-      </p:cxnSp>
-      <p:cxnSp>
-        <p:nvCxnSpPr>
-          <p:cNvPr id="30" name="line29" descr="sci-ppt:C2-E12-029"/>
-          <p:cNvCxnSpPr/>
-          <p:nvPr/>
-        </p:nvCxnSpPr>
-        <p:spPr>
-          <a:xfrm flipV="1">
-            <a:off x="9387840" y="2660294"/>
-            <a:ext cx="142240" cy="104851"/>
-          </a:xfrm>
-          <a:prstGeom prst="line">
-            <a:avLst/>
-          </a:prstGeom>
-          <a:ln w="25400">
-            <a:solidFill>
-              <a:srgbClr val="8EDBD4"/>
-            </a:solidFill>
-          </a:ln>
-          <a:effectLst/>
-        </p:spPr>
-      </p:cxnSp>
-      <p:cxnSp>
-        <p:nvCxnSpPr>
-          <p:cNvPr id="31" name="line30" descr="sci-ppt:C2-E12-030"/>
-          <p:cNvCxnSpPr/>
-          <p:nvPr/>
-        </p:nvCxnSpPr>
-        <p:spPr>
-          <a:xfrm flipV="1">
-            <a:off x="9530080" y="2550566"/>
-            <a:ext cx="142240" cy="109728"/>
-          </a:xfrm>
-          <a:prstGeom prst="line">
-            <a:avLst/>
-          </a:prstGeom>
-          <a:ln w="25400">
-            <a:solidFill>
-              <a:srgbClr val="8EDBD4"/>
-            </a:solidFill>
-          </a:ln>
-          <a:effectLst/>
-        </p:spPr>
-      </p:cxnSp>
-      <p:cxnSp>
-        <p:nvCxnSpPr>
-          <p:cNvPr id="32" name="line31" descr="sci-ppt:C2-E12-031"/>
-          <p:cNvCxnSpPr/>
-          <p:nvPr/>
-        </p:nvCxnSpPr>
-        <p:spPr>
-          <a:xfrm flipV="1">
-            <a:off x="9672320" y="2435961"/>
-            <a:ext cx="142240" cy="114605"/>
-          </a:xfrm>
-          <a:prstGeom prst="line">
-            <a:avLst/>
-          </a:prstGeom>
-          <a:ln w="25400">
-            <a:solidFill>
-              <a:srgbClr val="8EDBD4"/>
-            </a:solidFill>
-          </a:ln>
-          <a:effectLst/>
-        </p:spPr>
-      </p:cxnSp>
-      <p:cxnSp>
-        <p:nvCxnSpPr>
-          <p:cNvPr id="33" name="line32" descr="sci-ppt:C2-E12-032"/>
-          <p:cNvCxnSpPr/>
-          <p:nvPr/>
-        </p:nvCxnSpPr>
-        <p:spPr>
-          <a:xfrm flipV="1">
-            <a:off x="9814560" y="2316480"/>
-            <a:ext cx="142240" cy="119481"/>
-          </a:xfrm>
-          <a:prstGeom prst="line">
-            <a:avLst/>
-          </a:prstGeom>
-          <a:ln w="25400">
-            <a:solidFill>
-              <a:srgbClr val="8EDBD4"/>
-            </a:solidFill>
-          </a:ln>
-          <a:effectLst/>
-        </p:spPr>
-      </p:cxnSp>
-      <p:cxnSp>
-        <p:nvCxnSpPr>
-          <p:cNvPr id="34" name="line33" descr="sci-ppt:C2-E12-033"/>
-          <p:cNvCxnSpPr/>
-          <p:nvPr/>
-        </p:nvCxnSpPr>
-        <p:spPr>
-          <a:xfrm flipV="1">
-            <a:off x="9956800" y="2192121"/>
-            <a:ext cx="142240" cy="124359"/>
-          </a:xfrm>
-          <a:prstGeom prst="line">
-            <a:avLst/>
-          </a:prstGeom>
-          <a:ln w="25400">
-            <a:solidFill>
-              <a:srgbClr val="8EDBD4"/>
-            </a:solidFill>
-          </a:ln>
-          <a:effectLst/>
-        </p:spPr>
-      </p:cxnSp>
-      <p:cxnSp>
-        <p:nvCxnSpPr>
-          <p:cNvPr id="35" name="line34" descr="sci-ppt:C2-E12-034"/>
-          <p:cNvCxnSpPr/>
-          <p:nvPr/>
-        </p:nvCxnSpPr>
-        <p:spPr>
-          <a:xfrm flipV="1">
-            <a:off x="10099040" y="2062886"/>
-            <a:ext cx="142240" cy="129235"/>
-          </a:xfrm>
-          <a:prstGeom prst="line">
-            <a:avLst/>
-          </a:prstGeom>
-          <a:ln w="25400">
-            <a:solidFill>
-              <a:srgbClr val="8EDBD4"/>
-            </a:solidFill>
-          </a:ln>
-          <a:effectLst/>
-        </p:spPr>
-      </p:cxnSp>
-      <p:cxnSp>
-        <p:nvCxnSpPr>
-          <p:cNvPr id="36" name="line35" descr="sci-ppt:C2-E12-035"/>
-          <p:cNvCxnSpPr/>
-          <p:nvPr/>
-        </p:nvCxnSpPr>
-        <p:spPr>
-          <a:xfrm flipV="1">
-            <a:off x="10241280" y="1928774"/>
-            <a:ext cx="142240" cy="134112"/>
-          </a:xfrm>
-          <a:prstGeom prst="line">
-            <a:avLst/>
-          </a:prstGeom>
-          <a:ln w="25400">
-            <a:solidFill>
-              <a:srgbClr val="8EDBD4"/>
-            </a:solidFill>
-          </a:ln>
-          <a:effectLst/>
-        </p:spPr>
-      </p:cxnSp>
-      <p:cxnSp>
-        <p:nvCxnSpPr>
-          <p:cNvPr id="37" name="line36" descr="sci-ppt:C2-E12-036"/>
-          <p:cNvCxnSpPr/>
-          <p:nvPr/>
-        </p:nvCxnSpPr>
-        <p:spPr>
-          <a:xfrm flipV="1">
-            <a:off x="10383520" y="1789785"/>
-            <a:ext cx="142239" cy="138989"/>
-          </a:xfrm>
-          <a:prstGeom prst="line">
-            <a:avLst/>
-          </a:prstGeom>
-          <a:ln w="25400">
-            <a:solidFill>
-              <a:srgbClr val="8EDBD4"/>
-            </a:solidFill>
-          </a:ln>
-          <a:effectLst/>
-        </p:spPr>
-      </p:cxnSp>
-      <p:cxnSp>
-        <p:nvCxnSpPr>
-          <p:cNvPr id="38" name="line37" descr="sci-ppt:C2-E12-037"/>
-          <p:cNvCxnSpPr/>
-          <p:nvPr/>
-        </p:nvCxnSpPr>
-        <p:spPr>
-          <a:xfrm flipV="1">
-            <a:off x="10525759" y="1645920"/>
-            <a:ext cx="142241" cy="143865"/>
-          </a:xfrm>
-          <a:prstGeom prst="line">
-            <a:avLst/>
-          </a:prstGeom>
-          <a:ln w="25400">
-            <a:solidFill>
-              <a:srgbClr val="8EDBD4"/>
-            </a:solidFill>
-          </a:ln>
-          <a:effectLst/>
-        </p:spPr>
-      </p:cxnSp>
-      <p:sp>
-        <p:nvSpPr>
-          <p:cNvPr id="39" name="text38" descr="sci-ppt:C2-E12-038"/>
+        <p:txBody>
+          <a:bodyPr rtlCol="0" anchor="ctr"/>
+          <a:lstStyle/>
+          <a:p>
+            <a:pPr algn="ctr"/>
+          </a:p>
+        </p:txBody>
+      </p:sp>
+      <p:sp>
+        <p:nvSpPr>
+          <p:cNvPr id="54" name="C2-E12 text 52" descr="sci-ppt:o052"/>
           <p:cNvSpPr txBox="1"/>
           <p:nvPr/>
         </p:nvSpPr>
         <p:spPr>
           <a:xfrm>
-            <a:off x="975360" y="3474720"/>
-            <a:ext cx="5242560" cy="340156"/>
+            <a:off x="914400" y="5733288"/>
+            <a:ext cx="10972800" cy="433070"/>
           </a:xfrm>
           <a:prstGeom prst="rect">
             <a:avLst/>
@@ -4014,7 +5371,7 @@
           <a:effectLst/>
         </p:spPr>
         <p:txBody>
-          <a:bodyPr wrap="none" lIns="27432" rIns="27432" tIns="18288" bIns="18288" anchor="ctr">
+          <a:bodyPr wrap="none" lIns="18288" rIns="18288" tIns="18288" bIns="18288" anchor="t">
             <a:spAutoFit/>
           </a:bodyPr>
           <a:lstStyle/>
@@ -4025,39 +5382,15 @@
               </a:spcAft>
             </a:pPr>
             <a:r>
-              <a:rPr sz="1728" b="0" i="0">
+              <a:rPr sz="1250" b="0" i="0">
                 <a:solidFill>
                   <a:srgbClr val="E7F0F3"/>
                 </a:solidFill>
                 <a:latin typeface="Arial"/>
               </a:rPr>
-              <a:t>Schematic trend within stated fit ranges</a:t>
-            </a:r>
-          </a:p>
-        </p:txBody>
-      </p:sp>
-      <p:sp>
-        <p:nvSpPr>
-          <p:cNvPr id="40" name="text39" descr="sci-ppt:C2-E12-039"/>
-          <p:cNvSpPr txBox="1"/>
-          <p:nvPr/>
-        </p:nvSpPr>
-        <p:spPr>
-          <a:xfrm>
-            <a:off x="975360" y="3048000"/>
-            <a:ext cx="4876800" cy="359054"/>
-          </a:xfrm>
-          <a:prstGeom prst="rect">
-            <a:avLst/>
-          </a:prstGeom>
-          <a:noFill/>
-          <a:effectLst/>
-        </p:spPr>
-        <p:txBody>
-          <a:bodyPr wrap="none" lIns="27432" rIns="27432" tIns="18288" bIns="18288" anchor="ctr">
-            <a:spAutoFit/>
-          </a:bodyPr>
-          <a:lstStyle/>
+              <a:t>At 293 K the saturation pressure is below 1 bar; the liquid is superheated only when the surroundings or the liquid pressure sit</a:t>
+            </a:r>
+          </a:p>
           <a:p>
             <a:pPr algn="l">
               <a:spcAft>
@@ -4065,27 +5398,27 @@
               </a:spcAft>
             </a:pPr>
             <a:r>
-              <a:rPr sz="1823" b="0" i="0">
+              <a:rPr sz="1250" b="0" i="0">
                 <a:solidFill>
-                  <a:srgbClr val="F6BC77"/>
+                  <a:srgbClr val="E7F0F3"/>
                 </a:solidFill>
                 <a:latin typeface="Arial"/>
               </a:rPr>
-              <a:t>Not an activation threshold</a:t>
-            </a:r>
-          </a:p>
-        </p:txBody>
-      </p:sp>
-      <p:sp>
-        <p:nvSpPr>
-          <p:cNvPr id="41" name="text40" descr="sci-ppt:C2-E12-040"/>
+              <a:t>below the curve.</a:t>
+            </a:r>
+          </a:p>
+        </p:txBody>
+      </p:sp>
+      <p:sp>
+        <p:nvSpPr>
+          <p:cNvPr id="55" name="C2-E12 text 53" descr="sci-ppt:o053"/>
           <p:cNvSpPr txBox="1"/>
           <p:nvPr/>
         </p:nvSpPr>
         <p:spPr>
           <a:xfrm>
-            <a:off x="365760" y="4974336"/>
-            <a:ext cx="5547360" cy="321259"/>
+            <a:off x="320040" y="6510528"/>
+            <a:ext cx="11521440" cy="200660"/>
           </a:xfrm>
           <a:prstGeom prst="rect">
             <a:avLst/>
@@ -4094,7 +5427,7 @@
           <a:effectLst/>
         </p:spPr>
         <p:txBody>
-          <a:bodyPr wrap="none" lIns="27432" rIns="27432" tIns="18288" bIns="18288" anchor="ctr">
+          <a:bodyPr wrap="none" lIns="18288" rIns="18288" tIns="18288" bIns="18288" anchor="t">
             <a:spAutoFit/>
           </a:bodyPr>
           <a:lstStyle/>
@@ -4105,253 +5438,13 @@
               </a:spcAft>
             </a:pPr>
             <a:r>
-              <a:rPr sz="1632" b="0" i="0">
-                <a:solidFill>
-                  <a:srgbClr val="E7F0F3"/>
-                </a:solidFill>
-                <a:latin typeface="Arial"/>
-              </a:rPr>
-              <a:t>T: interface temperature</a:t>
-            </a:r>
-          </a:p>
-        </p:txBody>
-      </p:sp>
-      <p:sp>
-        <p:nvSpPr>
-          <p:cNvPr id="42" name="text41" descr="sci-ppt:C2-E12-041"/>
-          <p:cNvSpPr txBox="1"/>
-          <p:nvPr/>
-        </p:nvSpPr>
-        <p:spPr>
-          <a:xfrm>
-            <a:off x="365760" y="5266944"/>
-            <a:ext cx="5547360" cy="321259"/>
-          </a:xfrm>
-          <a:prstGeom prst="rect">
-            <a:avLst/>
-          </a:prstGeom>
-          <a:noFill/>
-          <a:effectLst/>
-        </p:spPr>
-        <p:txBody>
-          <a:bodyPr wrap="none" lIns="27432" rIns="27432" tIns="18288" bIns="18288" anchor="ctr">
-            <a:spAutoFit/>
-          </a:bodyPr>
-          <a:lstStyle/>
-          <a:p>
-            <a:pPr algn="l">
-              <a:spcAft>
-                <a:spcPts val="0"/>
-              </a:spcAft>
-            </a:pPr>
-            <a:r>
-              <a:rPr sz="1632" b="0" i="0">
-                <a:solidFill>
-                  <a:srgbClr val="E7F0F3"/>
-                </a:solidFill>
-                <a:latin typeface="Arial"/>
-              </a:rPr>
-              <a:t>282.82–337.94 K: fit domain</a:t>
-            </a:r>
-          </a:p>
-        </p:txBody>
-      </p:sp>
-      <p:sp>
-        <p:nvSpPr>
-          <p:cNvPr id="43" name="text42" descr="sci-ppt:C2-E12-042"/>
-          <p:cNvSpPr txBox="1"/>
-          <p:nvPr/>
-        </p:nvSpPr>
-        <p:spPr>
-          <a:xfrm>
-            <a:off x="365760" y="5559552"/>
-            <a:ext cx="5547360" cy="321259"/>
-          </a:xfrm>
-          <a:prstGeom prst="rect">
-            <a:avLst/>
-          </a:prstGeom>
-          <a:noFill/>
-          <a:effectLst/>
-        </p:spPr>
-        <p:txBody>
-          <a:bodyPr wrap="none" lIns="27432" rIns="27432" tIns="18288" bIns="18288" anchor="ctr">
-            <a:spAutoFit/>
-          </a:bodyPr>
-          <a:lstStyle/>
-          <a:p>
-            <a:pPr algn="l">
-              <a:spcAft>
-                <a:spcPts val="0"/>
-              </a:spcAft>
-            </a:pPr>
-            <a:r>
-              <a:rPr sz="1632" b="0" i="0">
-                <a:solidFill>
-                  <a:srgbClr val="E7F0F3"/>
-                </a:solidFill>
-                <a:latin typeface="Arial"/>
-              </a:rPr>
-              <a:t>4.2063; 1103.454 K; 39.77 K: coefficients</a:t>
-            </a:r>
-          </a:p>
-        </p:txBody>
-      </p:sp>
-      <p:sp>
-        <p:nvSpPr>
-          <p:cNvPr id="44" name="text43" descr="sci-ppt:C2-E12-043"/>
-          <p:cNvSpPr txBox="1"/>
-          <p:nvPr/>
-        </p:nvSpPr>
-        <p:spPr>
-          <a:xfrm>
-            <a:off x="6156960" y="4974336"/>
-            <a:ext cx="5547360" cy="321259"/>
-          </a:xfrm>
-          <a:prstGeom prst="rect">
-            <a:avLst/>
-          </a:prstGeom>
-          <a:noFill/>
-          <a:effectLst/>
-        </p:spPr>
-        <p:txBody>
-          <a:bodyPr wrap="none" lIns="27432" rIns="27432" tIns="18288" bIns="18288" anchor="ctr">
-            <a:spAutoFit/>
-          </a:bodyPr>
-          <a:lstStyle/>
-          <a:p>
-            <a:pPr algn="l">
-              <a:spcAft>
-                <a:spcPts val="0"/>
-              </a:spcAft>
-            </a:pPr>
-            <a:r>
-              <a:rPr sz="1632" b="0" i="0">
-                <a:solidFill>
-                  <a:srgbClr val="E7F0F3"/>
-                </a:solidFill>
-                <a:latin typeface="Arial"/>
-              </a:rPr>
-              <a:t>p_sat,PFP: bulk equilibrium vapor pressure</a:t>
-            </a:r>
-          </a:p>
-        </p:txBody>
-      </p:sp>
-      <p:sp>
-        <p:nvSpPr>
-          <p:cNvPr id="45" name="text44" descr="sci-ppt:C2-E12-044"/>
-          <p:cNvSpPr txBox="1"/>
-          <p:nvPr/>
-        </p:nvSpPr>
-        <p:spPr>
-          <a:xfrm>
-            <a:off x="6156960" y="5266944"/>
-            <a:ext cx="5547360" cy="321259"/>
-          </a:xfrm>
-          <a:prstGeom prst="rect">
-            <a:avLst/>
-          </a:prstGeom>
-          <a:noFill/>
-          <a:effectLst/>
-        </p:spPr>
-        <p:txBody>
-          <a:bodyPr wrap="none" lIns="27432" rIns="27432" tIns="18288" bIns="18288" anchor="ctr">
-            <a:spAutoFit/>
-          </a:bodyPr>
-          <a:lstStyle/>
-          <a:p>
-            <a:pPr algn="l">
-              <a:spcAft>
-                <a:spcPts val="0"/>
-              </a:spcAft>
-            </a:pPr>
-            <a:r>
-              <a:rPr sz="1632" b="0" i="0">
-                <a:solidFill>
-                  <a:srgbClr val="E7F0F3"/>
-                </a:solidFill>
-                <a:latin typeface="Arial"/>
-              </a:rPr>
-              <a:t>1 bar = 10⁵ Pa</a:t>
-            </a:r>
-          </a:p>
-        </p:txBody>
-      </p:sp>
-      <p:sp>
-        <p:nvSpPr>
-          <p:cNvPr id="46" name="text45" descr="sci-ppt:C2-E12-045"/>
-          <p:cNvSpPr txBox="1"/>
-          <p:nvPr/>
-        </p:nvSpPr>
-        <p:spPr>
-          <a:xfrm>
-            <a:off x="365760" y="6278880"/>
-            <a:ext cx="11277600" cy="302361"/>
-          </a:xfrm>
-          <a:prstGeom prst="rect">
-            <a:avLst/>
-          </a:prstGeom>
-          <a:noFill/>
-          <a:effectLst/>
-        </p:spPr>
-        <p:txBody>
-          <a:bodyPr wrap="none" lIns="27432" rIns="27432" tIns="18288" bIns="18288" anchor="ctr">
-            <a:spAutoFit/>
-          </a:bodyPr>
-          <a:lstStyle/>
-          <a:p>
-            <a:pPr algn="l">
-              <a:spcAft>
-                <a:spcPts val="0"/>
-              </a:spcAft>
-            </a:pPr>
-            <a:r>
-              <a:rPr sz="1536" b="0" i="0">
+              <a:rPr sz="1000" b="0" i="0">
                 <a:solidFill>
                   <a:srgbClr val="B4C7D2"/>
                 </a:solidFill>
                 <a:latin typeface="Arial"/>
               </a:rPr>
-              <a:t>Liquid and vapor coexist only when inventory and exchange permit</a:t>
-            </a:r>
-          </a:p>
-        </p:txBody>
-      </p:sp>
-      <p:sp>
-        <p:nvSpPr>
-          <p:cNvPr id="47" name="text46" descr="sci-ppt:C2-E12-046"/>
-          <p:cNvSpPr txBox="1"/>
-          <p:nvPr/>
-        </p:nvSpPr>
-        <p:spPr>
-          <a:xfrm>
-            <a:off x="365760" y="6571488"/>
-            <a:ext cx="11277600" cy="302361"/>
-          </a:xfrm>
-          <a:prstGeom prst="rect">
-            <a:avLst/>
-          </a:prstGeom>
-          <a:noFill/>
-          <a:effectLst/>
-        </p:spPr>
-        <p:txBody>
-          <a:bodyPr wrap="none" lIns="27432" rIns="27432" tIns="18288" bIns="18288" anchor="ctr">
-            <a:spAutoFit/>
-          </a:bodyPr>
-          <a:lstStyle/>
-          <a:p>
-            <a:pPr algn="l">
-              <a:spcAft>
-                <a:spcPts val="0"/>
-              </a:spcAft>
-            </a:pPr>
-            <a:r>
-              <a:rPr sz="1536" b="0" i="0">
-                <a:solidFill>
-                  <a:srgbClr val="B4C7D2"/>
-                </a:solidFill>
-                <a:latin typeface="Arial"/>
-              </a:rPr>
-              <a:t>This curve is not a laser-fluence threshold</a:t>
+              <a:t>Empirical PFP correlation of Eq. C2-E12 (log scale).</a:t>
             </a:r>
           </a:p>
         </p:txBody>
